--- a/ELECTRONICS RETAIL STORE presentation.pptx
+++ b/ELECTRONICS RETAIL STORE presentation.pptx
@@ -5,26 +5,33 @@
     <p:sldMasterId id="2147483648" r:id="rId1"/>
   </p:sldMasterIdLst>
   <p:notesMasterIdLst>
-    <p:notesMasterId r:id="rId11"/>
+    <p:notesMasterId r:id="rId18"/>
   </p:notesMasterIdLst>
   <p:handoutMasterIdLst>
-    <p:handoutMasterId r:id="rId12"/>
+    <p:handoutMasterId r:id="rId19"/>
   </p:handoutMasterIdLst>
   <p:sldIdLst>
     <p:sldId id="265" r:id="rId2"/>
-    <p:sldId id="310" r:id="rId3"/>
-    <p:sldId id="320" r:id="rId4"/>
-    <p:sldId id="321" r:id="rId5"/>
-    <p:sldId id="322" r:id="rId6"/>
-    <p:sldId id="315" r:id="rId7"/>
-    <p:sldId id="316" r:id="rId8"/>
-    <p:sldId id="323" r:id="rId9"/>
-    <p:sldId id="324" r:id="rId10"/>
+    <p:sldId id="325" r:id="rId3"/>
+    <p:sldId id="310" r:id="rId4"/>
+    <p:sldId id="320" r:id="rId5"/>
+    <p:sldId id="321" r:id="rId6"/>
+    <p:sldId id="329" r:id="rId7"/>
+    <p:sldId id="330" r:id="rId8"/>
+    <p:sldId id="331" r:id="rId9"/>
+    <p:sldId id="322" r:id="rId10"/>
+    <p:sldId id="332" r:id="rId11"/>
+    <p:sldId id="333" r:id="rId12"/>
+    <p:sldId id="334" r:id="rId13"/>
+    <p:sldId id="316" r:id="rId14"/>
+    <p:sldId id="323" r:id="rId15"/>
+    <p:sldId id="336" r:id="rId16"/>
+    <p:sldId id="324" r:id="rId17"/>
   </p:sldIdLst>
   <p:sldSz cx="12188825" cy="6858000"/>
   <p:notesSz cx="6858000" cy="9144000"/>
   <p:custDataLst>
-    <p:tags r:id="rId13"/>
+    <p:tags r:id="rId20"/>
   </p:custDataLst>
   <p:defaultTextStyle>
     <a:defPPr>
@@ -131,13 +138,20 @@
         </p14:section>
         <p14:section name="Untitled Section" id="{98534573-DDC6-498E-B37B-2ABBCC405E0F}">
           <p14:sldIdLst>
+            <p14:sldId id="325"/>
             <p14:sldId id="310"/>
             <p14:sldId id="320"/>
             <p14:sldId id="321"/>
+            <p14:sldId id="329"/>
+            <p14:sldId id="330"/>
+            <p14:sldId id="331"/>
             <p14:sldId id="322"/>
-            <p14:sldId id="315"/>
+            <p14:sldId id="332"/>
+            <p14:sldId id="333"/>
+            <p14:sldId id="334"/>
             <p14:sldId id="316"/>
             <p14:sldId id="323"/>
+            <p14:sldId id="336"/>
             <p14:sldId id="324"/>
           </p14:sldIdLst>
         </p14:section>
@@ -4137,6 +4151,1180 @@
 </p:sld>
 </file>
 
+<file path=ppt/slides/slide10.xml><?xml version="1.0" encoding="utf-8"?>
+<p:sld xmlns:a="http://schemas.openxmlformats.org/drawingml/2006/main" xmlns:r="http://schemas.openxmlformats.org/officeDocument/2006/relationships" xmlns:p="http://schemas.openxmlformats.org/presentationml/2006/main">
+  <p:cSld>
+    <p:spTree>
+      <p:nvGrpSpPr>
+        <p:cNvPr id="1" name="">
+          <a:extLst>
+            <a:ext uri="{FF2B5EF4-FFF2-40B4-BE49-F238E27FC236}">
+              <a16:creationId xmlns:a16="http://schemas.microsoft.com/office/drawing/2014/main" id="{E6A45DA8-EA35-FBB2-3824-BF2DE0040553}"/>
+            </a:ext>
+          </a:extLst>
+        </p:cNvPr>
+        <p:cNvGrpSpPr/>
+        <p:nvPr/>
+      </p:nvGrpSpPr>
+      <p:grpSpPr>
+        <a:xfrm>
+          <a:off x="0" y="0"/>
+          <a:ext cx="0" cy="0"/>
+          <a:chOff x="0" y="0"/>
+          <a:chExt cx="0" cy="0"/>
+        </a:xfrm>
+      </p:grpSpPr>
+      <p:sp>
+        <p:nvSpPr>
+          <p:cNvPr id="2" name="Title 1">
+            <a:extLst>
+              <a:ext uri="{FF2B5EF4-FFF2-40B4-BE49-F238E27FC236}">
+                <a16:creationId xmlns:a16="http://schemas.microsoft.com/office/drawing/2014/main" id="{38289B5E-F019-7DE8-51A3-0A70E4E4C71D}"/>
+              </a:ext>
+            </a:extLst>
+          </p:cNvPr>
+          <p:cNvSpPr>
+            <a:spLocks noGrp="1"/>
+          </p:cNvSpPr>
+          <p:nvPr>
+            <p:ph type="title"/>
+          </p:nvPr>
+        </p:nvSpPr>
+        <p:spPr>
+          <a:xfrm>
+            <a:off x="684212" y="838200"/>
+            <a:ext cx="3967999" cy="1600200"/>
+          </a:xfrm>
+        </p:spPr>
+        <p:txBody>
+          <a:bodyPr/>
+          <a:lstStyle/>
+          <a:p>
+            <a:r>
+              <a:rPr lang="en-US" dirty="0">
+                <a:solidFill>
+                  <a:schemeClr val="accent1"/>
+                </a:solidFill>
+              </a:rPr>
+              <a:t>CUSTOMER SEGMENTATION</a:t>
+            </a:r>
+            <a:br>
+              <a:rPr lang="en-US" dirty="0">
+                <a:solidFill>
+                  <a:schemeClr val="accent1"/>
+                </a:solidFill>
+              </a:rPr>
+            </a:br>
+            <a:r>
+              <a:rPr lang="en-US" dirty="0">
+                <a:solidFill>
+                  <a:schemeClr val="accent1"/>
+                </a:solidFill>
+              </a:rPr>
+              <a:t>ANALYSIS</a:t>
+            </a:r>
+          </a:p>
+        </p:txBody>
+      </p:sp>
+      <p:sp>
+        <p:nvSpPr>
+          <p:cNvPr id="8" name="Text Placeholder 7">
+            <a:extLst>
+              <a:ext uri="{FF2B5EF4-FFF2-40B4-BE49-F238E27FC236}">
+                <a16:creationId xmlns:a16="http://schemas.microsoft.com/office/drawing/2014/main" id="{146AC52F-87B7-9C42-7342-A07E104347EB}"/>
+              </a:ext>
+            </a:extLst>
+          </p:cNvPr>
+          <p:cNvSpPr>
+            <a:spLocks noGrp="1"/>
+          </p:cNvSpPr>
+          <p:nvPr>
+            <p:ph type="body" sz="half" idx="2"/>
+          </p:nvPr>
+        </p:nvSpPr>
+        <p:spPr>
+          <a:xfrm>
+            <a:off x="836611" y="2819400"/>
+            <a:ext cx="3810001" cy="2362200"/>
+          </a:xfrm>
+        </p:spPr>
+        <p:txBody>
+          <a:bodyPr>
+            <a:normAutofit/>
+          </a:bodyPr>
+          <a:lstStyle/>
+          <a:p>
+            <a:r>
+              <a:rPr lang="en-US" dirty="0">
+                <a:solidFill>
+                  <a:schemeClr val="bg2">
+                    <a:lumMod val="50000"/>
+                    <a:lumOff val="50000"/>
+                  </a:schemeClr>
+                </a:solidFill>
+              </a:rPr>
+              <a:t>KEY FINDINGS</a:t>
+            </a:r>
+          </a:p>
+          <a:p>
+            <a:r>
+              <a:rPr lang="en-US" dirty="0"/>
+              <a:t>Senior and Middle-aged customers account for 76.8% revenue suggesting a loyal, higher spending demographic that should be targeted for premium product marketing</a:t>
+            </a:r>
+          </a:p>
+          <a:p>
+            <a:endParaRPr lang="en-US" dirty="0">
+              <a:solidFill>
+                <a:schemeClr val="bg2">
+                  <a:lumMod val="50000"/>
+                  <a:lumOff val="50000"/>
+                </a:schemeClr>
+              </a:solidFill>
+            </a:endParaRPr>
+          </a:p>
+        </p:txBody>
+      </p:sp>
+      <p:pic>
+        <p:nvPicPr>
+          <p:cNvPr id="4" name="Content Placeholder 3">
+            <a:extLst>
+              <a:ext uri="{FF2B5EF4-FFF2-40B4-BE49-F238E27FC236}">
+                <a16:creationId xmlns:a16="http://schemas.microsoft.com/office/drawing/2014/main" id="{4BB901BD-FB94-E3C6-27F7-936CEEF6C28E}"/>
+              </a:ext>
+            </a:extLst>
+          </p:cNvPr>
+          <p:cNvPicPr>
+            <a:picLocks noGrp="1" noChangeAspect="1"/>
+          </p:cNvPicPr>
+          <p:nvPr>
+            <p:ph idx="1"/>
+          </p:nvPr>
+        </p:nvPicPr>
+        <p:blipFill>
+          <a:blip r:embed="rId2">
+            <a:extLst>
+              <a:ext uri="{28A0092B-C50C-407E-A947-70E740481C1C}">
+                <a14:useLocalDpi xmlns:a14="http://schemas.microsoft.com/office/drawing/2010/main" val="0"/>
+              </a:ext>
+            </a:extLst>
+          </a:blip>
+          <a:stretch>
+            <a:fillRect/>
+          </a:stretch>
+        </p:blipFill>
+        <p:spPr>
+          <a:xfrm>
+            <a:off x="4722812" y="533400"/>
+            <a:ext cx="7543800" cy="5257800"/>
+          </a:xfrm>
+          <a:prstGeom prst="rect">
+            <a:avLst/>
+          </a:prstGeom>
+        </p:spPr>
+      </p:pic>
+    </p:spTree>
+    <p:extLst>
+      <p:ext uri="{BB962C8B-B14F-4D97-AF65-F5344CB8AC3E}">
+        <p14:creationId xmlns:p14="http://schemas.microsoft.com/office/powerpoint/2010/main" val="2999875635"/>
+      </p:ext>
+    </p:extLst>
+  </p:cSld>
+  <p:clrMapOvr>
+    <a:masterClrMapping/>
+  </p:clrMapOvr>
+  <mc:AlternateContent xmlns:mc="http://schemas.openxmlformats.org/markup-compatibility/2006">
+    <mc:Choice xmlns:p14="http://schemas.microsoft.com/office/powerpoint/2010/main" Requires="p14">
+      <p:transition spd="med" p14:dur="700">
+        <p:fade/>
+      </p:transition>
+    </mc:Choice>
+    <mc:Fallback>
+      <p:transition spd="med">
+        <p:fade/>
+      </p:transition>
+    </mc:Fallback>
+  </mc:AlternateContent>
+</p:sld>
+</file>
+
+<file path=ppt/slides/slide11.xml><?xml version="1.0" encoding="utf-8"?>
+<p:sld xmlns:a="http://schemas.openxmlformats.org/drawingml/2006/main" xmlns:r="http://schemas.openxmlformats.org/officeDocument/2006/relationships" xmlns:p="http://schemas.openxmlformats.org/presentationml/2006/main">
+  <p:cSld>
+    <p:spTree>
+      <p:nvGrpSpPr>
+        <p:cNvPr id="1" name="">
+          <a:extLst>
+            <a:ext uri="{FF2B5EF4-FFF2-40B4-BE49-F238E27FC236}">
+              <a16:creationId xmlns:a16="http://schemas.microsoft.com/office/drawing/2014/main" id="{CBBB6A3B-C9E3-CB4A-D504-C99EDA7069DC}"/>
+            </a:ext>
+          </a:extLst>
+        </p:cNvPr>
+        <p:cNvGrpSpPr/>
+        <p:nvPr/>
+      </p:nvGrpSpPr>
+      <p:grpSpPr>
+        <a:xfrm>
+          <a:off x="0" y="0"/>
+          <a:ext cx="0" cy="0"/>
+          <a:chOff x="0" y="0"/>
+          <a:chExt cx="0" cy="0"/>
+        </a:xfrm>
+      </p:grpSpPr>
+      <p:sp>
+        <p:nvSpPr>
+          <p:cNvPr id="2" name="Title 1">
+            <a:extLst>
+              <a:ext uri="{FF2B5EF4-FFF2-40B4-BE49-F238E27FC236}">
+                <a16:creationId xmlns:a16="http://schemas.microsoft.com/office/drawing/2014/main" id="{FC7D04C6-EDA9-79C0-2AD0-D5C80D742D98}"/>
+              </a:ext>
+            </a:extLst>
+          </p:cNvPr>
+          <p:cNvSpPr>
+            <a:spLocks noGrp="1"/>
+          </p:cNvSpPr>
+          <p:nvPr>
+            <p:ph type="title"/>
+          </p:nvPr>
+        </p:nvSpPr>
+        <p:spPr>
+          <a:xfrm>
+            <a:off x="684212" y="838200"/>
+            <a:ext cx="3967999" cy="1600200"/>
+          </a:xfrm>
+        </p:spPr>
+        <p:txBody>
+          <a:bodyPr/>
+          <a:lstStyle/>
+          <a:p>
+            <a:r>
+              <a:rPr lang="en-US" dirty="0">
+                <a:solidFill>
+                  <a:schemeClr val="accent1"/>
+                </a:solidFill>
+              </a:rPr>
+              <a:t>CUSTOMER SEGMENTATION</a:t>
+            </a:r>
+            <a:br>
+              <a:rPr lang="en-US" dirty="0">
+                <a:solidFill>
+                  <a:schemeClr val="accent1"/>
+                </a:solidFill>
+              </a:rPr>
+            </a:br>
+            <a:r>
+              <a:rPr lang="en-US" dirty="0">
+                <a:solidFill>
+                  <a:schemeClr val="accent1"/>
+                </a:solidFill>
+              </a:rPr>
+              <a:t>ANALYSIS</a:t>
+            </a:r>
+          </a:p>
+        </p:txBody>
+      </p:sp>
+      <p:sp>
+        <p:nvSpPr>
+          <p:cNvPr id="8" name="Text Placeholder 7">
+            <a:extLst>
+              <a:ext uri="{FF2B5EF4-FFF2-40B4-BE49-F238E27FC236}">
+                <a16:creationId xmlns:a16="http://schemas.microsoft.com/office/drawing/2014/main" id="{4EBF6168-4F78-15D7-D4FF-0C97A1CAD7A5}"/>
+              </a:ext>
+            </a:extLst>
+          </p:cNvPr>
+          <p:cNvSpPr>
+            <a:spLocks noGrp="1"/>
+          </p:cNvSpPr>
+          <p:nvPr>
+            <p:ph type="body" sz="half" idx="2"/>
+          </p:nvPr>
+        </p:nvSpPr>
+        <p:spPr>
+          <a:xfrm>
+            <a:off x="836611" y="2819400"/>
+            <a:ext cx="3810001" cy="1295400"/>
+          </a:xfrm>
+        </p:spPr>
+        <p:txBody>
+          <a:bodyPr>
+            <a:normAutofit fontScale="92500"/>
+          </a:bodyPr>
+          <a:lstStyle/>
+          <a:p>
+            <a:r>
+              <a:rPr lang="en-US" dirty="0">
+                <a:solidFill>
+                  <a:schemeClr val="bg2">
+                    <a:lumMod val="50000"/>
+                    <a:lumOff val="50000"/>
+                  </a:schemeClr>
+                </a:solidFill>
+              </a:rPr>
+              <a:t>KEY FINDINGS</a:t>
+            </a:r>
+          </a:p>
+          <a:p>
+            <a:r>
+              <a:rPr lang="en-US" dirty="0"/>
+              <a:t>The united states is by far the highest largest market contributing almost half of the revenue with 6885 customers</a:t>
+            </a:r>
+          </a:p>
+          <a:p>
+            <a:endParaRPr lang="en-US" dirty="0">
+              <a:solidFill>
+                <a:schemeClr val="bg2">
+                  <a:lumMod val="50000"/>
+                  <a:lumOff val="50000"/>
+                </a:schemeClr>
+              </a:solidFill>
+            </a:endParaRPr>
+          </a:p>
+        </p:txBody>
+      </p:sp>
+      <p:pic>
+        <p:nvPicPr>
+          <p:cNvPr id="10" name="Content Placeholder 9">
+            <a:extLst>
+              <a:ext uri="{FF2B5EF4-FFF2-40B4-BE49-F238E27FC236}">
+                <a16:creationId xmlns:a16="http://schemas.microsoft.com/office/drawing/2014/main" id="{C9869337-65CE-C7C8-758B-9C1ED29D7D37}"/>
+              </a:ext>
+            </a:extLst>
+          </p:cNvPr>
+          <p:cNvPicPr>
+            <a:picLocks noGrp="1" noChangeAspect="1"/>
+          </p:cNvPicPr>
+          <p:nvPr>
+            <p:ph idx="1"/>
+          </p:nvPr>
+        </p:nvPicPr>
+        <p:blipFill>
+          <a:blip r:embed="rId2">
+            <a:extLst>
+              <a:ext uri="{28A0092B-C50C-407E-A947-70E740481C1C}">
+                <a14:useLocalDpi xmlns:a14="http://schemas.microsoft.com/office/drawing/2010/main" val="0"/>
+              </a:ext>
+            </a:extLst>
+          </a:blip>
+          <a:stretch>
+            <a:fillRect/>
+          </a:stretch>
+        </p:blipFill>
+        <p:spPr>
+          <a:xfrm>
+            <a:off x="4951412" y="533400"/>
+            <a:ext cx="6705599" cy="5029199"/>
+          </a:xfrm>
+          <a:prstGeom prst="rect">
+            <a:avLst/>
+          </a:prstGeom>
+        </p:spPr>
+      </p:pic>
+    </p:spTree>
+    <p:extLst>
+      <p:ext uri="{BB962C8B-B14F-4D97-AF65-F5344CB8AC3E}">
+        <p14:creationId xmlns:p14="http://schemas.microsoft.com/office/powerpoint/2010/main" val="154279557"/>
+      </p:ext>
+    </p:extLst>
+  </p:cSld>
+  <p:clrMapOvr>
+    <a:masterClrMapping/>
+  </p:clrMapOvr>
+  <mc:AlternateContent xmlns:mc="http://schemas.openxmlformats.org/markup-compatibility/2006">
+    <mc:Choice xmlns:p14="http://schemas.microsoft.com/office/powerpoint/2010/main" Requires="p14">
+      <p:transition spd="med" p14:dur="700">
+        <p:fade/>
+      </p:transition>
+    </mc:Choice>
+    <mc:Fallback>
+      <p:transition spd="med">
+        <p:fade/>
+      </p:transition>
+    </mc:Fallback>
+  </mc:AlternateContent>
+</p:sld>
+</file>
+
+<file path=ppt/slides/slide12.xml><?xml version="1.0" encoding="utf-8"?>
+<p:sld xmlns:a="http://schemas.openxmlformats.org/drawingml/2006/main" xmlns:r="http://schemas.openxmlformats.org/officeDocument/2006/relationships" xmlns:p="http://schemas.openxmlformats.org/presentationml/2006/main">
+  <p:cSld>
+    <p:spTree>
+      <p:nvGrpSpPr>
+        <p:cNvPr id="1" name="">
+          <a:extLst>
+            <a:ext uri="{FF2B5EF4-FFF2-40B4-BE49-F238E27FC236}">
+              <a16:creationId xmlns:a16="http://schemas.microsoft.com/office/drawing/2014/main" id="{E3F0D3AB-6F35-E611-5335-40BB4D5CDCFF}"/>
+            </a:ext>
+          </a:extLst>
+        </p:cNvPr>
+        <p:cNvGrpSpPr/>
+        <p:nvPr/>
+      </p:nvGrpSpPr>
+      <p:grpSpPr>
+        <a:xfrm>
+          <a:off x="0" y="0"/>
+          <a:ext cx="0" cy="0"/>
+          <a:chOff x="0" y="0"/>
+          <a:chExt cx="0" cy="0"/>
+        </a:xfrm>
+      </p:grpSpPr>
+      <p:sp>
+        <p:nvSpPr>
+          <p:cNvPr id="2" name="Title 1">
+            <a:extLst>
+              <a:ext uri="{FF2B5EF4-FFF2-40B4-BE49-F238E27FC236}">
+                <a16:creationId xmlns:a16="http://schemas.microsoft.com/office/drawing/2014/main" id="{F403A558-79BF-9FCA-0B8C-462DBF5803CD}"/>
+              </a:ext>
+            </a:extLst>
+          </p:cNvPr>
+          <p:cNvSpPr>
+            <a:spLocks noGrp="1"/>
+          </p:cNvSpPr>
+          <p:nvPr>
+            <p:ph type="title"/>
+          </p:nvPr>
+        </p:nvSpPr>
+        <p:spPr>
+          <a:xfrm>
+            <a:off x="684212" y="838200"/>
+            <a:ext cx="3967999" cy="1600200"/>
+          </a:xfrm>
+        </p:spPr>
+        <p:txBody>
+          <a:bodyPr/>
+          <a:lstStyle/>
+          <a:p>
+            <a:r>
+              <a:rPr lang="en-US" dirty="0">
+                <a:solidFill>
+                  <a:schemeClr val="accent1"/>
+                </a:solidFill>
+              </a:rPr>
+              <a:t>CUSTOMER SEGMENTATION</a:t>
+            </a:r>
+            <a:br>
+              <a:rPr lang="en-US" dirty="0">
+                <a:solidFill>
+                  <a:schemeClr val="accent1"/>
+                </a:solidFill>
+              </a:rPr>
+            </a:br>
+            <a:r>
+              <a:rPr lang="en-US" dirty="0">
+                <a:solidFill>
+                  <a:schemeClr val="accent1"/>
+                </a:solidFill>
+              </a:rPr>
+              <a:t>ANALYSIS</a:t>
+            </a:r>
+          </a:p>
+        </p:txBody>
+      </p:sp>
+      <p:sp>
+        <p:nvSpPr>
+          <p:cNvPr id="8" name="Text Placeholder 7">
+            <a:extLst>
+              <a:ext uri="{FF2B5EF4-FFF2-40B4-BE49-F238E27FC236}">
+                <a16:creationId xmlns:a16="http://schemas.microsoft.com/office/drawing/2014/main" id="{E159C063-926F-8CCF-DB80-EEC7A7F7A7F7}"/>
+              </a:ext>
+            </a:extLst>
+          </p:cNvPr>
+          <p:cNvSpPr>
+            <a:spLocks noGrp="1"/>
+          </p:cNvSpPr>
+          <p:nvPr>
+            <p:ph type="body" sz="half" idx="2"/>
+          </p:nvPr>
+        </p:nvSpPr>
+        <p:spPr>
+          <a:xfrm>
+            <a:off x="836611" y="2819400"/>
+            <a:ext cx="3810001" cy="533400"/>
+          </a:xfrm>
+        </p:spPr>
+        <p:txBody>
+          <a:bodyPr/>
+          <a:lstStyle/>
+          <a:p>
+            <a:r>
+              <a:rPr lang="en-US" dirty="0">
+                <a:solidFill>
+                  <a:schemeClr val="bg2">
+                    <a:lumMod val="50000"/>
+                    <a:lumOff val="50000"/>
+                  </a:schemeClr>
+                </a:solidFill>
+              </a:rPr>
+              <a:t>KEY FINDINGS</a:t>
+            </a:r>
+          </a:p>
+        </p:txBody>
+      </p:sp>
+      <p:sp>
+        <p:nvSpPr>
+          <p:cNvPr id="7" name="Content Placeholder 6">
+            <a:extLst>
+              <a:ext uri="{FF2B5EF4-FFF2-40B4-BE49-F238E27FC236}">
+                <a16:creationId xmlns:a16="http://schemas.microsoft.com/office/drawing/2014/main" id="{BF113332-8B47-9AC1-1A2A-E0BE959093E9}"/>
+              </a:ext>
+            </a:extLst>
+          </p:cNvPr>
+          <p:cNvSpPr>
+            <a:spLocks noGrp="1"/>
+          </p:cNvSpPr>
+          <p:nvPr>
+            <p:ph idx="1"/>
+          </p:nvPr>
+        </p:nvSpPr>
+        <p:spPr>
+          <a:xfrm>
+            <a:off x="4951414" y="1143000"/>
+            <a:ext cx="6400800" cy="2819400"/>
+          </a:xfrm>
+        </p:spPr>
+        <p:txBody>
+          <a:bodyPr/>
+          <a:lstStyle/>
+          <a:p>
+            <a:r>
+              <a:rPr lang="en-US" sz="1800" dirty="0"/>
+              <a:t>The total number of customers  was  11,887 with an average spending of  4.69k USD ,  with an average order of 2 items per customer</a:t>
+            </a:r>
+          </a:p>
+          <a:p>
+            <a:r>
+              <a:rPr lang="en-US" sz="1800" dirty="0"/>
+              <a:t>Revenue is almost evenly split between male and female customers indicating gender neutral appeal of the product range</a:t>
+            </a:r>
+          </a:p>
+          <a:p>
+            <a:pPr marL="0" indent="0">
+              <a:buNone/>
+            </a:pPr>
+            <a:endParaRPr lang="en-US" dirty="0"/>
+          </a:p>
+        </p:txBody>
+      </p:sp>
+    </p:spTree>
+    <p:extLst>
+      <p:ext uri="{BB962C8B-B14F-4D97-AF65-F5344CB8AC3E}">
+        <p14:creationId xmlns:p14="http://schemas.microsoft.com/office/powerpoint/2010/main" val="2010888480"/>
+      </p:ext>
+    </p:extLst>
+  </p:cSld>
+  <p:clrMapOvr>
+    <a:masterClrMapping/>
+  </p:clrMapOvr>
+  <mc:AlternateContent xmlns:mc="http://schemas.openxmlformats.org/markup-compatibility/2006">
+    <mc:Choice xmlns:p14="http://schemas.microsoft.com/office/powerpoint/2010/main" Requires="p14">
+      <p:transition spd="med" p14:dur="700">
+        <p:fade/>
+      </p:transition>
+    </mc:Choice>
+    <mc:Fallback>
+      <p:transition spd="med">
+        <p:fade/>
+      </p:transition>
+    </mc:Fallback>
+  </mc:AlternateContent>
+</p:sld>
+</file>
+
+<file path=ppt/slides/slide13.xml><?xml version="1.0" encoding="utf-8"?>
+<p:sld xmlns:a="http://schemas.openxmlformats.org/drawingml/2006/main" xmlns:r="http://schemas.openxmlformats.org/officeDocument/2006/relationships" xmlns:p="http://schemas.openxmlformats.org/presentationml/2006/main">
+  <p:cSld>
+    <p:spTree>
+      <p:nvGrpSpPr>
+        <p:cNvPr id="1" name=""/>
+        <p:cNvGrpSpPr/>
+        <p:nvPr/>
+      </p:nvGrpSpPr>
+      <p:grpSpPr>
+        <a:xfrm>
+          <a:off x="0" y="0"/>
+          <a:ext cx="0" cy="0"/>
+          <a:chOff x="0" y="0"/>
+          <a:chExt cx="0" cy="0"/>
+        </a:xfrm>
+      </p:grpSpPr>
+      <p:sp>
+        <p:nvSpPr>
+          <p:cNvPr id="2" name="Title 1"/>
+          <p:cNvSpPr>
+            <a:spLocks noGrp="1"/>
+          </p:cNvSpPr>
+          <p:nvPr>
+            <p:ph type="title"/>
+          </p:nvPr>
+        </p:nvSpPr>
+        <p:spPr>
+          <a:xfrm>
+            <a:off x="227013" y="76200"/>
+            <a:ext cx="10439402" cy="533400"/>
+          </a:xfrm>
+        </p:spPr>
+        <p:txBody>
+          <a:bodyPr>
+            <a:normAutofit fontScale="90000"/>
+          </a:bodyPr>
+          <a:lstStyle/>
+          <a:p>
+            <a:r>
+              <a:rPr lang="en-US" dirty="0">
+                <a:solidFill>
+                  <a:schemeClr val="accent1"/>
+                </a:solidFill>
+              </a:rPr>
+              <a:t>CUSTOMER SEGMANTATION ANALYSIS</a:t>
+            </a:r>
+          </a:p>
+        </p:txBody>
+      </p:sp>
+      <p:pic>
+        <p:nvPicPr>
+          <p:cNvPr id="6" name="Content Placeholder 5">
+            <a:extLst>
+              <a:ext uri="{FF2B5EF4-FFF2-40B4-BE49-F238E27FC236}">
+                <a16:creationId xmlns:a16="http://schemas.microsoft.com/office/drawing/2014/main" id="{2E4D62A9-53BD-C241-358B-EAF5B20A3566}"/>
+              </a:ext>
+            </a:extLst>
+          </p:cNvPr>
+          <p:cNvPicPr>
+            <a:picLocks noGrp="1" noChangeAspect="1"/>
+          </p:cNvPicPr>
+          <p:nvPr>
+            <p:ph idx="1"/>
+          </p:nvPr>
+        </p:nvPicPr>
+        <p:blipFill>
+          <a:blip r:embed="rId2">
+            <a:extLst>
+              <a:ext uri="{28A0092B-C50C-407E-A947-70E740481C1C}">
+                <a14:useLocalDpi xmlns:a14="http://schemas.microsoft.com/office/drawing/2010/main" val="0"/>
+              </a:ext>
+            </a:extLst>
+          </a:blip>
+          <a:srcRect/>
+          <a:stretch/>
+        </p:blipFill>
+        <p:spPr>
+          <a:xfrm>
+            <a:off x="0" y="609600"/>
+            <a:ext cx="12114211" cy="6172200"/>
+          </a:xfrm>
+          <a:prstGeom prst="rect">
+            <a:avLst/>
+          </a:prstGeom>
+        </p:spPr>
+      </p:pic>
+    </p:spTree>
+    <p:extLst>
+      <p:ext uri="{BB962C8B-B14F-4D97-AF65-F5344CB8AC3E}">
+        <p14:creationId xmlns:p14="http://schemas.microsoft.com/office/powerpoint/2010/main" val="2590506655"/>
+      </p:ext>
+    </p:extLst>
+  </p:cSld>
+  <p:clrMapOvr>
+    <a:masterClrMapping/>
+  </p:clrMapOvr>
+  <mc:AlternateContent xmlns:mc="http://schemas.openxmlformats.org/markup-compatibility/2006" xmlns:p14="http://schemas.microsoft.com/office/powerpoint/2010/main">
+    <mc:Choice Requires="p14">
+      <p:transition spd="med" p14:dur="700">
+        <p:fade/>
+      </p:transition>
+    </mc:Choice>
+    <mc:Fallback xmlns="">
+      <p:transition spd="med">
+        <p:fade/>
+      </p:transition>
+    </mc:Fallback>
+  </mc:AlternateContent>
+</p:sld>
+</file>
+
+<file path=ppt/slides/slide14.xml><?xml version="1.0" encoding="utf-8"?>
+<p:sld xmlns:a="http://schemas.openxmlformats.org/drawingml/2006/main" xmlns:r="http://schemas.openxmlformats.org/officeDocument/2006/relationships" xmlns:p="http://schemas.openxmlformats.org/presentationml/2006/main">
+  <p:cSld>
+    <p:spTree>
+      <p:nvGrpSpPr>
+        <p:cNvPr id="1" name=""/>
+        <p:cNvGrpSpPr/>
+        <p:nvPr/>
+      </p:nvGrpSpPr>
+      <p:grpSpPr>
+        <a:xfrm>
+          <a:off x="0" y="0"/>
+          <a:ext cx="0" cy="0"/>
+          <a:chOff x="0" y="0"/>
+          <a:chExt cx="0" cy="0"/>
+        </a:xfrm>
+      </p:grpSpPr>
+      <p:sp>
+        <p:nvSpPr>
+          <p:cNvPr id="2" name="Title 1">
+            <a:extLst>
+              <a:ext uri="{FF2B5EF4-FFF2-40B4-BE49-F238E27FC236}">
+                <a16:creationId xmlns:a16="http://schemas.microsoft.com/office/drawing/2014/main" id="{69B1DB6C-B587-28F8-17C7-56D2BC66372A}"/>
+              </a:ext>
+            </a:extLst>
+          </p:cNvPr>
+          <p:cNvSpPr>
+            <a:spLocks noGrp="1"/>
+          </p:cNvSpPr>
+          <p:nvPr>
+            <p:ph type="title"/>
+          </p:nvPr>
+        </p:nvSpPr>
+        <p:spPr>
+          <a:xfrm>
+            <a:off x="1522413" y="381000"/>
+            <a:ext cx="9144001" cy="609600"/>
+          </a:xfrm>
+        </p:spPr>
+        <p:txBody>
+          <a:bodyPr/>
+          <a:lstStyle/>
+          <a:p>
+            <a:r>
+              <a:rPr lang="en-US" dirty="0">
+                <a:solidFill>
+                  <a:schemeClr val="accent1"/>
+                </a:solidFill>
+              </a:rPr>
+              <a:t>Key Recommendations</a:t>
+            </a:r>
+          </a:p>
+        </p:txBody>
+      </p:sp>
+      <p:sp>
+        <p:nvSpPr>
+          <p:cNvPr id="3" name="Content Placeholder 2">
+            <a:extLst>
+              <a:ext uri="{FF2B5EF4-FFF2-40B4-BE49-F238E27FC236}">
+                <a16:creationId xmlns:a16="http://schemas.microsoft.com/office/drawing/2014/main" id="{889DD315-5AB5-446D-B7D6-C2643E8BB498}"/>
+              </a:ext>
+            </a:extLst>
+          </p:cNvPr>
+          <p:cNvSpPr>
+            <a:spLocks noGrp="1"/>
+          </p:cNvSpPr>
+          <p:nvPr>
+            <p:ph idx="1"/>
+          </p:nvPr>
+        </p:nvSpPr>
+        <p:spPr>
+          <a:xfrm>
+            <a:off x="760413" y="1143001"/>
+            <a:ext cx="9896392" cy="4876800"/>
+          </a:xfrm>
+        </p:spPr>
+        <p:txBody>
+          <a:bodyPr>
+            <a:noAutofit/>
+          </a:bodyPr>
+          <a:lstStyle/>
+          <a:p>
+            <a:pPr marL="0" indent="0">
+              <a:buNone/>
+            </a:pPr>
+            <a:r>
+              <a:rPr lang="en-US" sz="1400" dirty="0">
+                <a:solidFill>
+                  <a:schemeClr val="accent1"/>
+                </a:solidFill>
+              </a:rPr>
+              <a:t>1.</a:t>
+            </a:r>
+            <a:r>
+              <a:rPr lang="en-US" sz="1400" i="1" dirty="0">
+                <a:solidFill>
+                  <a:schemeClr val="accent1"/>
+                </a:solidFill>
+              </a:rPr>
+              <a:t>Grow the online channel </a:t>
+            </a:r>
+          </a:p>
+          <a:p>
+            <a:pPr marL="0" indent="0">
+              <a:buNone/>
+            </a:pPr>
+            <a:r>
+              <a:rPr lang="en-US" sz="1400" dirty="0"/>
+              <a:t>With only 20.5% of revenue online, investing in e-commerce </a:t>
+            </a:r>
+            <a:r>
+              <a:rPr lang="en-US" sz="1400" dirty="0" err="1"/>
+              <a:t>ux</a:t>
+            </a:r>
+            <a:r>
+              <a:rPr lang="en-US" sz="1400" dirty="0"/>
+              <a:t>, digital marketing and same day delivery can significantly increase revenue without requiring additional physical stores</a:t>
+            </a:r>
+          </a:p>
+          <a:p>
+            <a:pPr marL="0" indent="0">
+              <a:buNone/>
+            </a:pPr>
+            <a:r>
+              <a:rPr lang="en-US" sz="1400" i="1" dirty="0">
+                <a:solidFill>
+                  <a:schemeClr val="accent1"/>
+                </a:solidFill>
+              </a:rPr>
+              <a:t>2.Expand geographic foot print</a:t>
+            </a:r>
+          </a:p>
+          <a:p>
+            <a:pPr marL="0" indent="0">
+              <a:buNone/>
+            </a:pPr>
+            <a:r>
+              <a:rPr lang="en-US" sz="1400" dirty="0"/>
+              <a:t>Reduce dependency on the US market, Australia and Southern Europe (Italy)show growing demand and offer expansion opportunities</a:t>
+            </a:r>
+          </a:p>
+          <a:p>
+            <a:pPr marL="0" indent="0">
+              <a:buNone/>
+            </a:pPr>
+            <a:r>
+              <a:rPr lang="en-US" sz="1400" i="1" dirty="0">
+                <a:solidFill>
+                  <a:schemeClr val="accent1"/>
+                </a:solidFill>
+              </a:rPr>
+              <a:t>3.Target Senior Segment</a:t>
+            </a:r>
+          </a:p>
+          <a:p>
+            <a:pPr marL="0" indent="0">
+              <a:buNone/>
+            </a:pPr>
+            <a:r>
+              <a:rPr lang="en-US" sz="1400" dirty="0"/>
+              <a:t>Seniors generate more revenue, design dedicated loyalty programs, easier to use product lines and in store assistance program to retain growth </a:t>
+            </a:r>
+          </a:p>
+          <a:p>
+            <a:pPr marL="0" indent="0">
+              <a:buNone/>
+            </a:pPr>
+            <a:r>
+              <a:rPr lang="en-US" sz="1400" i="1" dirty="0">
+                <a:solidFill>
+                  <a:schemeClr val="accent1"/>
+                </a:solidFill>
+              </a:rPr>
+              <a:t>4.Invest in high margin category items</a:t>
+            </a:r>
+          </a:p>
+          <a:p>
+            <a:pPr marL="0" indent="0">
+              <a:buNone/>
+            </a:pPr>
+            <a:r>
+              <a:rPr lang="en-GB" sz="1400" dirty="0"/>
+              <a:t>Cameras &amp;amp; Camcorders (60.1% margin) and TV &amp;amp; Video (59.7% margin) offer superior returns. Allocate more floor space and targeted promotions to these categories</a:t>
+            </a:r>
+            <a:r>
+              <a:rPr lang="en-GB" sz="1400" i="1" dirty="0">
+                <a:solidFill>
+                  <a:schemeClr val="accent1"/>
+                </a:solidFill>
+              </a:rPr>
+              <a:t>.</a:t>
+            </a:r>
+            <a:endParaRPr lang="en-US" sz="1400" i="1" dirty="0">
+              <a:solidFill>
+                <a:schemeClr val="accent1"/>
+              </a:solidFill>
+            </a:endParaRPr>
+          </a:p>
+          <a:p>
+            <a:pPr marL="0" indent="0">
+              <a:buNone/>
+            </a:pPr>
+            <a:r>
+              <a:rPr lang="en-GB" sz="1400" i="1" dirty="0">
+                <a:solidFill>
+                  <a:schemeClr val="accent1"/>
+                </a:solidFill>
+              </a:rPr>
+              <a:t>5.Post-Pandemic Recovery Strategy</a:t>
+            </a:r>
+          </a:p>
+          <a:p>
+            <a:pPr marL="0" indent="0">
+              <a:buNone/>
+            </a:pPr>
+            <a:r>
+              <a:rPr lang="en-GB" sz="1400" dirty="0"/>
+              <a:t>The sharp revenue decline in 2020-2021 warrants a focused recovery strategy: reactivation campaigns for dormant customers, aggressive pricing for high-demand products like laptops and home electronics (which surged during remote work/study).</a:t>
+            </a:r>
+            <a:endParaRPr lang="en-US" sz="1400" dirty="0"/>
+          </a:p>
+        </p:txBody>
+      </p:sp>
+    </p:spTree>
+    <p:extLst>
+      <p:ext uri="{BB962C8B-B14F-4D97-AF65-F5344CB8AC3E}">
+        <p14:creationId xmlns:p14="http://schemas.microsoft.com/office/powerpoint/2010/main" val="3814220841"/>
+      </p:ext>
+    </p:extLst>
+  </p:cSld>
+  <p:clrMapOvr>
+    <a:masterClrMapping/>
+  </p:clrMapOvr>
+  <mc:AlternateContent xmlns:mc="http://schemas.openxmlformats.org/markup-compatibility/2006" xmlns:p14="http://schemas.microsoft.com/office/powerpoint/2010/main">
+    <mc:Choice Requires="p14">
+      <p:transition spd="med" p14:dur="700">
+        <p:fade/>
+      </p:transition>
+    </mc:Choice>
+    <mc:Fallback xmlns="">
+      <p:transition spd="med">
+        <p:fade/>
+      </p:transition>
+    </mc:Fallback>
+  </mc:AlternateContent>
+</p:sld>
+</file>
+
+<file path=ppt/slides/slide15.xml><?xml version="1.0" encoding="utf-8"?>
+<p:sld xmlns:a="http://schemas.openxmlformats.org/drawingml/2006/main" xmlns:r="http://schemas.openxmlformats.org/officeDocument/2006/relationships" xmlns:p="http://schemas.openxmlformats.org/presentationml/2006/main">
+  <p:cSld>
+    <p:spTree>
+      <p:nvGrpSpPr>
+        <p:cNvPr id="1" name=""/>
+        <p:cNvGrpSpPr/>
+        <p:nvPr/>
+      </p:nvGrpSpPr>
+      <p:grpSpPr>
+        <a:xfrm>
+          <a:off x="0" y="0"/>
+          <a:ext cx="0" cy="0"/>
+          <a:chOff x="0" y="0"/>
+          <a:chExt cx="0" cy="0"/>
+        </a:xfrm>
+      </p:grpSpPr>
+      <p:sp>
+        <p:nvSpPr>
+          <p:cNvPr id="2" name="Title 1">
+            <a:extLst>
+              <a:ext uri="{FF2B5EF4-FFF2-40B4-BE49-F238E27FC236}">
+                <a16:creationId xmlns:a16="http://schemas.microsoft.com/office/drawing/2014/main" id="{F44D934D-C441-D158-EB3F-3D281AC33378}"/>
+              </a:ext>
+            </a:extLst>
+          </p:cNvPr>
+          <p:cNvSpPr>
+            <a:spLocks noGrp="1"/>
+          </p:cNvSpPr>
+          <p:nvPr>
+            <p:ph type="title"/>
+          </p:nvPr>
+        </p:nvSpPr>
+        <p:spPr/>
+        <p:txBody>
+          <a:bodyPr/>
+          <a:lstStyle/>
+          <a:p>
+            <a:r>
+              <a:rPr lang="en-US" dirty="0">
+                <a:solidFill>
+                  <a:schemeClr val="accent1"/>
+                </a:solidFill>
+              </a:rPr>
+              <a:t>Advanced Analysis that could be done</a:t>
+            </a:r>
+          </a:p>
+        </p:txBody>
+      </p:sp>
+      <p:sp>
+        <p:nvSpPr>
+          <p:cNvPr id="3" name="Content Placeholder 2">
+            <a:extLst>
+              <a:ext uri="{FF2B5EF4-FFF2-40B4-BE49-F238E27FC236}">
+                <a16:creationId xmlns:a16="http://schemas.microsoft.com/office/drawing/2014/main" id="{01C80473-3EE9-D9ED-336D-55952957976B}"/>
+              </a:ext>
+            </a:extLst>
+          </p:cNvPr>
+          <p:cNvSpPr>
+            <a:spLocks noGrp="1"/>
+          </p:cNvSpPr>
+          <p:nvPr>
+            <p:ph idx="1"/>
+          </p:nvPr>
+        </p:nvSpPr>
+        <p:spPr/>
+        <p:txBody>
+          <a:bodyPr/>
+          <a:lstStyle/>
+          <a:p>
+            <a:pPr marL="0" indent="0">
+              <a:buNone/>
+            </a:pPr>
+            <a:r>
+              <a:rPr lang="en-US" dirty="0"/>
+              <a:t>1.RFM Analysis for customer segmentation</a:t>
+            </a:r>
+          </a:p>
+          <a:p>
+            <a:pPr marL="0" indent="0">
+              <a:buNone/>
+            </a:pPr>
+            <a:r>
+              <a:rPr lang="en-US" dirty="0"/>
+              <a:t>2.Different exchange rates and its effect on the company's profit</a:t>
+            </a:r>
+          </a:p>
+          <a:p>
+            <a:pPr marL="0" indent="0">
+              <a:buNone/>
+            </a:pPr>
+            <a:r>
+              <a:rPr lang="en-US" dirty="0"/>
+              <a:t>3.Use of sets and more advanced parameters on tableau</a:t>
+            </a:r>
+          </a:p>
+        </p:txBody>
+      </p:sp>
+    </p:spTree>
+    <p:extLst>
+      <p:ext uri="{BB962C8B-B14F-4D97-AF65-F5344CB8AC3E}">
+        <p14:creationId xmlns:p14="http://schemas.microsoft.com/office/powerpoint/2010/main" val="2625409202"/>
+      </p:ext>
+    </p:extLst>
+  </p:cSld>
+  <p:clrMapOvr>
+    <a:masterClrMapping/>
+  </p:clrMapOvr>
+  <mc:AlternateContent xmlns:mc="http://schemas.openxmlformats.org/markup-compatibility/2006" xmlns:p14="http://schemas.microsoft.com/office/powerpoint/2010/main">
+    <mc:Choice Requires="p14">
+      <p:transition spd="med" p14:dur="700">
+        <p:fade/>
+      </p:transition>
+    </mc:Choice>
+    <mc:Fallback xmlns="">
+      <p:transition spd="med">
+        <p:fade/>
+      </p:transition>
+    </mc:Fallback>
+  </mc:AlternateContent>
+</p:sld>
+</file>
+
+<file path=ppt/slides/slide16.xml><?xml version="1.0" encoding="utf-8"?>
+<p:sld xmlns:a="http://schemas.openxmlformats.org/drawingml/2006/main" xmlns:r="http://schemas.openxmlformats.org/officeDocument/2006/relationships" xmlns:p="http://schemas.openxmlformats.org/presentationml/2006/main">
+  <p:cSld>
+    <p:spTree>
+      <p:nvGrpSpPr>
+        <p:cNvPr id="1" name=""/>
+        <p:cNvGrpSpPr/>
+        <p:nvPr/>
+      </p:nvGrpSpPr>
+      <p:grpSpPr>
+        <a:xfrm>
+          <a:off x="0" y="0"/>
+          <a:ext cx="0" cy="0"/>
+          <a:chOff x="0" y="0"/>
+          <a:chExt cx="0" cy="0"/>
+        </a:xfrm>
+      </p:grpSpPr>
+      <p:sp>
+        <p:nvSpPr>
+          <p:cNvPr id="4" name="Title 3">
+            <a:extLst>
+              <a:ext uri="{FF2B5EF4-FFF2-40B4-BE49-F238E27FC236}">
+                <a16:creationId xmlns:a16="http://schemas.microsoft.com/office/drawing/2014/main" id="{9BD3ED6C-FBCF-2136-903C-F5CCD1D099E8}"/>
+              </a:ext>
+            </a:extLst>
+          </p:cNvPr>
+          <p:cNvSpPr>
+            <a:spLocks noGrp="1"/>
+          </p:cNvSpPr>
+          <p:nvPr>
+            <p:ph type="title"/>
+          </p:nvPr>
+        </p:nvSpPr>
+        <p:spPr>
+          <a:xfrm>
+            <a:off x="1064680" y="2590799"/>
+            <a:ext cx="8692399" cy="1371600"/>
+          </a:xfrm>
+        </p:spPr>
+        <p:txBody>
+          <a:bodyPr/>
+          <a:lstStyle/>
+          <a:p>
+            <a:r>
+              <a:rPr lang="en-US" dirty="0">
+                <a:solidFill>
+                  <a:schemeClr val="accent1"/>
+                </a:solidFill>
+              </a:rPr>
+              <a:t>THANK YOU</a:t>
+            </a:r>
+          </a:p>
+        </p:txBody>
+      </p:sp>
+      <p:sp>
+        <p:nvSpPr>
+          <p:cNvPr id="5" name="Text Placeholder 4">
+            <a:extLst>
+              <a:ext uri="{FF2B5EF4-FFF2-40B4-BE49-F238E27FC236}">
+                <a16:creationId xmlns:a16="http://schemas.microsoft.com/office/drawing/2014/main" id="{D5E979C8-5F06-62C2-0F6C-002421089644}"/>
+              </a:ext>
+            </a:extLst>
+          </p:cNvPr>
+          <p:cNvSpPr>
+            <a:spLocks noGrp="1"/>
+          </p:cNvSpPr>
+          <p:nvPr>
+            <p:ph type="body" idx="1"/>
+          </p:nvPr>
+        </p:nvSpPr>
+        <p:spPr>
+          <a:xfrm>
+            <a:off x="227013" y="6400800"/>
+            <a:ext cx="9525534" cy="381000"/>
+          </a:xfrm>
+        </p:spPr>
+        <p:txBody>
+          <a:bodyPr>
+            <a:normAutofit/>
+          </a:bodyPr>
+          <a:lstStyle/>
+          <a:p>
+            <a:r>
+              <a:rPr lang="en-US" sz="1100" i="1" dirty="0"/>
+              <a:t>Data analytics capstone project may 2026</a:t>
+            </a:r>
+          </a:p>
+        </p:txBody>
+      </p:sp>
+    </p:spTree>
+    <p:extLst>
+      <p:ext uri="{BB962C8B-B14F-4D97-AF65-F5344CB8AC3E}">
+        <p14:creationId xmlns:p14="http://schemas.microsoft.com/office/powerpoint/2010/main" val="2106757151"/>
+      </p:ext>
+    </p:extLst>
+  </p:cSld>
+  <p:clrMapOvr>
+    <a:masterClrMapping/>
+  </p:clrMapOvr>
+  <mc:AlternateContent xmlns:mc="http://schemas.openxmlformats.org/markup-compatibility/2006" xmlns:p14="http://schemas.microsoft.com/office/powerpoint/2010/main">
+    <mc:Choice Requires="p14">
+      <p:transition spd="med" p14:dur="700">
+        <p:fade/>
+      </p:transition>
+    </mc:Choice>
+    <mc:Fallback xmlns="">
+      <p:transition spd="med">
+        <p:fade/>
+      </p:transition>
+    </mc:Fallback>
+  </mc:AlternateContent>
+</p:sld>
+</file>
+
 <file path=ppt/slides/slide2.xml><?xml version="1.0" encoding="utf-8"?>
 <p:sld xmlns:a="http://schemas.openxmlformats.org/drawingml/2006/main" xmlns:r="http://schemas.openxmlformats.org/officeDocument/2006/relationships" xmlns:p="http://schemas.openxmlformats.org/presentationml/2006/main">
   <p:cSld>
@@ -4156,45 +5344,10 @@
       </p:grpSpPr>
       <p:sp>
         <p:nvSpPr>
-          <p:cNvPr id="13" name="Title 12"/>
-          <p:cNvSpPr>
-            <a:spLocks noGrp="1"/>
-          </p:cNvSpPr>
-          <p:nvPr>
-            <p:ph type="title"/>
-          </p:nvPr>
-        </p:nvSpPr>
-        <p:spPr>
-          <a:xfrm>
-            <a:off x="1522413" y="559749"/>
-            <a:ext cx="9144001" cy="583251"/>
-          </a:xfrm>
-        </p:spPr>
-        <p:txBody>
-          <a:bodyPr>
-            <a:normAutofit fontScale="90000"/>
-          </a:bodyPr>
-          <a:lstStyle/>
-          <a:p>
-            <a:r>
-              <a:rPr lang="en-US" dirty="0">
-                <a:solidFill>
-                  <a:schemeClr val="tx2">
-                    <a:lumMod val="50000"/>
-                  </a:schemeClr>
-                </a:solidFill>
-              </a:rPr>
-              <a:t>PROJECT METHODOLGY</a:t>
-            </a:r>
-          </a:p>
-        </p:txBody>
-      </p:sp>
-      <p:sp>
-        <p:nvSpPr>
-          <p:cNvPr id="5" name="Content Placeholder 4">
+          <p:cNvPr id="2" name="Title 1">
             <a:extLst>
               <a:ext uri="{FF2B5EF4-FFF2-40B4-BE49-F238E27FC236}">
-                <a16:creationId xmlns:a16="http://schemas.microsoft.com/office/drawing/2014/main" id="{EBBDB624-B57F-590C-FAA3-883610C88F2A}"/>
+                <a16:creationId xmlns:a16="http://schemas.microsoft.com/office/drawing/2014/main" id="{D8CD59C6-A1F9-D7FA-B2EE-E7E6DA424EBB}"/>
               </a:ext>
             </a:extLst>
           </p:cNvPr>
@@ -4202,229 +5355,334 @@
             <a:spLocks noGrp="1"/>
           </p:cNvSpPr>
           <p:nvPr>
-            <p:ph idx="1"/>
+            <p:ph type="title"/>
           </p:nvPr>
         </p:nvSpPr>
         <p:spPr>
           <a:xfrm>
-            <a:off x="1065212" y="1143000"/>
-            <a:ext cx="10744200" cy="5486400"/>
+            <a:off x="379413" y="381000"/>
+            <a:ext cx="10287002" cy="1371600"/>
           </a:xfrm>
         </p:spPr>
         <p:txBody>
-          <a:bodyPr>
-            <a:normAutofit/>
+          <a:bodyPr/>
+          <a:lstStyle/>
+          <a:p>
+            <a:r>
+              <a:rPr lang="en-US" dirty="0">
+                <a:solidFill>
+                  <a:schemeClr val="accent1"/>
+                </a:solidFill>
+              </a:rPr>
+              <a:t>PROBLEM STATEMENT</a:t>
+            </a:r>
+          </a:p>
+        </p:txBody>
+      </p:sp>
+      <p:sp>
+        <p:nvSpPr>
+          <p:cNvPr id="4" name="Rectangle 1">
+            <a:extLst>
+              <a:ext uri="{FF2B5EF4-FFF2-40B4-BE49-F238E27FC236}">
+                <a16:creationId xmlns:a16="http://schemas.microsoft.com/office/drawing/2014/main" id="{CDCD9956-AD5C-215F-4392-DB0AE13D2278}"/>
+              </a:ext>
+            </a:extLst>
+          </p:cNvPr>
+          <p:cNvSpPr>
+            <a:spLocks noGrp="1" noChangeArrowheads="1"/>
+          </p:cNvSpPr>
+          <p:nvPr>
+            <p:ph idx="1"/>
+          </p:nvPr>
+        </p:nvSpPr>
+        <p:spPr bwMode="auto">
+          <a:xfrm>
+            <a:off x="303212" y="2337925"/>
+            <a:ext cx="10668001" cy="2585323"/>
+          </a:xfrm>
+          <a:prstGeom prst="rect">
+            <a:avLst/>
+          </a:prstGeom>
+          <a:noFill/>
+          <a:ln>
+            <a:noFill/>
+          </a:ln>
+          <a:effectLst/>
+          <a:extLst>
+            <a:ext uri="{909E8E84-426E-40DD-AFC4-6F175D3DCCD1}">
+              <a14:hiddenFill xmlns:a14="http://schemas.microsoft.com/office/drawing/2010/main">
+                <a:solidFill>
+                  <a:schemeClr val="accent1"/>
+                </a:solidFill>
+              </a14:hiddenFill>
+            </a:ext>
+            <a:ext uri="{91240B29-F687-4F45-9708-019B960494DF}">
+              <a14:hiddenLine xmlns:a14="http://schemas.microsoft.com/office/drawing/2010/main" w="9525">
+                <a:solidFill>
+                  <a:schemeClr val="tx1"/>
+                </a:solidFill>
+                <a:miter lim="800000"/>
+                <a:headEnd/>
+                <a:tailEnd/>
+              </a14:hiddenLine>
+            </a:ext>
+            <a:ext uri="{AF507438-7753-43E0-B8FC-AC1667EBCBE1}">
+              <a14:hiddenEffects xmlns:a14="http://schemas.microsoft.com/office/drawing/2010/main">
+                <a:effectLst>
+                  <a:outerShdw dist="35921" dir="2700000" algn="ctr" rotWithShape="0">
+                    <a:schemeClr val="bg2"/>
+                  </a:outerShdw>
+                </a:effectLst>
+              </a14:hiddenEffects>
+            </a:ext>
+          </a:extLst>
+        </p:spPr>
+        <p:txBody>
+          <a:bodyPr vert="horz" wrap="square" lIns="91440" tIns="45720" rIns="91440" bIns="45720" numCol="1" anchor="ctr" anchorCtr="0" compatLnSpc="1">
+            <a:prstTxWarp prst="textNoShape">
+              <a:avLst/>
+            </a:prstTxWarp>
+            <a:spAutoFit/>
           </a:bodyPr>
           <a:lstStyle/>
           <a:p>
-            <a:pPr marL="0" indent="0">
-              <a:buNone/>
+            <a:pPr marL="0" marR="0" lvl="0" indent="0" algn="l" defTabSz="914400" rtl="0" eaLnBrk="0" fontAlgn="base" latinLnBrk="0" hangingPunct="0">
+              <a:lnSpc>
+                <a:spcPct val="100000"/>
+              </a:lnSpc>
+              <a:spcBef>
+                <a:spcPct val="0"/>
+              </a:spcBef>
+              <a:spcAft>
+                <a:spcPct val="0"/>
+              </a:spcAft>
+              <a:buClrTx/>
+              <a:buSzTx/>
+              <a:buFontTx/>
+              <a:buNone/>
+              <a:tabLst/>
             </a:pPr>
             <a:r>
-              <a:rPr lang="en-US" sz="1600" i="1" dirty="0">
+              <a:rPr kumimoji="0" lang="en-US" altLang="en-US" sz="1800" b="0" i="0" u="none" strike="noStrike" cap="none" normalizeH="0" baseline="0" dirty="0">
+                <a:ln>
+                  <a:noFill/>
+                </a:ln>
                 <a:solidFill>
-                  <a:schemeClr val="bg2">
-                    <a:lumMod val="50000"/>
-                    <a:lumOff val="50000"/>
-                  </a:schemeClr>
+                  <a:schemeClr val="tx1"/>
                 </a:solidFill>
+                <a:effectLst/>
               </a:rPr>
-              <a:t>1.Data collection</a:t>
-            </a:r>
-          </a:p>
-          <a:p>
-            <a:pPr marL="0" indent="0">
-              <a:buNone/>
+              <a:t>Retail businesses generate large amounts of sales and customer data, </a:t>
+            </a:r>
+          </a:p>
+          <a:p>
+            <a:pPr marL="0" marR="0" lvl="0" indent="0" algn="l" defTabSz="914400" rtl="0" eaLnBrk="0" fontAlgn="base" latinLnBrk="0" hangingPunct="0">
+              <a:lnSpc>
+                <a:spcPct val="100000"/>
+              </a:lnSpc>
+              <a:spcBef>
+                <a:spcPct val="0"/>
+              </a:spcBef>
+              <a:spcAft>
+                <a:spcPct val="0"/>
+              </a:spcAft>
+              <a:buClrTx/>
+              <a:buSzTx/>
+              <a:buFontTx/>
+              <a:buNone/>
+              <a:tabLst/>
             </a:pPr>
             <a:r>
-              <a:rPr lang="en-US" sz="1600" dirty="0"/>
-              <a:t>Raw sales, customer, product  &amp; stores loaded into Excel across 5 worksheets</a:t>
-            </a:r>
-            <a:r>
-              <a:rPr lang="en-US" sz="1600" dirty="0">
+              <a:rPr kumimoji="0" lang="en-US" altLang="en-US" sz="1800" b="0" i="0" u="none" strike="noStrike" cap="none" normalizeH="0" baseline="0" dirty="0">
+                <a:ln>
+                  <a:noFill/>
+                </a:ln>
                 <a:solidFill>
-                  <a:srgbClr val="64748B"/>
+                  <a:schemeClr val="tx1"/>
                 </a:solidFill>
+                <a:effectLst/>
               </a:rPr>
-              <a:t>.</a:t>
-            </a:r>
-            <a:endParaRPr lang="en-US" sz="1600" dirty="0"/>
-          </a:p>
-          <a:p>
-            <a:pPr marL="0" indent="0">
-              <a:buNone/>
+              <a:t>but turning this data into actionable insights remains a challenge.</a:t>
+            </a:r>
+          </a:p>
+          <a:p>
+            <a:pPr marL="0" marR="0" lvl="0" indent="0" algn="l" defTabSz="914400" rtl="0" eaLnBrk="0" fontAlgn="base" latinLnBrk="0" hangingPunct="0">
+              <a:lnSpc>
+                <a:spcPct val="100000"/>
+              </a:lnSpc>
+              <a:spcBef>
+                <a:spcPct val="0"/>
+              </a:spcBef>
+              <a:spcAft>
+                <a:spcPct val="0"/>
+              </a:spcAft>
+              <a:buClrTx/>
+              <a:buSzTx/>
+              <a:buFontTx/>
+              <a:buNone/>
+              <a:tabLst/>
             </a:pPr>
-            <a:r>
-              <a:rPr lang="en-US" sz="1600" i="1" dirty="0">
+            <a:endParaRPr kumimoji="0" lang="en-US" altLang="en-US" sz="1800" b="0" i="0" u="none" strike="noStrike" cap="none" normalizeH="0" baseline="0" dirty="0">
+              <a:ln>
+                <a:noFill/>
+              </a:ln>
+              <a:solidFill>
+                <a:schemeClr val="tx1"/>
+              </a:solidFill>
+              <a:effectLst/>
+            </a:endParaRPr>
+          </a:p>
+          <a:p>
+            <a:pPr marL="0" marR="0" lvl="0" indent="0" algn="l" defTabSz="914400" rtl="0" eaLnBrk="0" fontAlgn="base" latinLnBrk="0" hangingPunct="0">
+              <a:lnSpc>
+                <a:spcPct val="100000"/>
+              </a:lnSpc>
+              <a:spcBef>
+                <a:spcPct val="0"/>
+              </a:spcBef>
+              <a:spcAft>
+                <a:spcPct val="0"/>
+              </a:spcAft>
+              <a:buClrTx/>
+              <a:buSzTx/>
+              <a:buFontTx/>
+              <a:buNone/>
+              <a:tabLst/>
+            </a:pPr>
+            <a:r>
+              <a:rPr kumimoji="0" lang="en-US" altLang="en-US" sz="1800" b="0" i="0" u="none" strike="noStrike" cap="none" normalizeH="0" baseline="0" dirty="0">
+                <a:ln>
+                  <a:noFill/>
+                </a:ln>
                 <a:solidFill>
-                  <a:schemeClr val="bg2">
-                    <a:lumMod val="50000"/>
-                    <a:lumOff val="50000"/>
-                  </a:schemeClr>
+                  <a:schemeClr val="tx1"/>
                 </a:solidFill>
+                <a:effectLst/>
               </a:rPr>
-              <a:t>2. Data cleaning in excel</a:t>
-            </a:r>
-          </a:p>
-          <a:p>
-            <a:pPr marL="0" indent="0">
-              <a:buNone/>
+              <a:t>This project analyzes revenue trends, profitability, and customer purchasing behavior for an electronics retail store using Excel and Tableau. </a:t>
+            </a:r>
+          </a:p>
+          <a:p>
+            <a:pPr marL="0" marR="0" lvl="0" indent="0" algn="l" defTabSz="914400" rtl="0" eaLnBrk="0" fontAlgn="base" latinLnBrk="0" hangingPunct="0">
+              <a:lnSpc>
+                <a:spcPct val="100000"/>
+              </a:lnSpc>
+              <a:spcBef>
+                <a:spcPct val="0"/>
+              </a:spcBef>
+              <a:spcAft>
+                <a:spcPct val="0"/>
+              </a:spcAft>
+              <a:buClrTx/>
+              <a:buSzTx/>
+              <a:buFontTx/>
+              <a:buNone/>
+              <a:tabLst/>
             </a:pPr>
-            <a:r>
-              <a:rPr lang="en-US" sz="1400" dirty="0"/>
-              <a:t>Removed duplicates, fixed date formats, filled missing values, standardized age to  age groups.</a:t>
-            </a:r>
-          </a:p>
-          <a:p>
-            <a:pPr marL="0" indent="0">
-              <a:buNone/>
+            <a:endParaRPr kumimoji="0" lang="en-US" altLang="en-US" sz="1800" b="0" i="0" u="none" strike="noStrike" cap="none" normalizeH="0" baseline="0" dirty="0">
+              <a:ln>
+                <a:noFill/>
+              </a:ln>
+              <a:solidFill>
+                <a:schemeClr val="tx1"/>
+              </a:solidFill>
+              <a:effectLst/>
+            </a:endParaRPr>
+          </a:p>
+          <a:p>
+            <a:pPr marL="0" marR="0" lvl="0" indent="0" algn="l" defTabSz="914400" rtl="0" eaLnBrk="0" fontAlgn="base" latinLnBrk="0" hangingPunct="0">
+              <a:lnSpc>
+                <a:spcPct val="100000"/>
+              </a:lnSpc>
+              <a:spcBef>
+                <a:spcPct val="0"/>
+              </a:spcBef>
+              <a:spcAft>
+                <a:spcPct val="0"/>
+              </a:spcAft>
+              <a:buClrTx/>
+              <a:buSzTx/>
+              <a:buFontTx/>
+              <a:buNone/>
+              <a:tabLst/>
             </a:pPr>
             <a:r>
-              <a:rPr lang="en-US" sz="1600" i="1" dirty="0">
+              <a:rPr kumimoji="0" lang="en-US" altLang="en-US" sz="1800" b="0" i="0" u="none" strike="noStrike" cap="none" normalizeH="0" baseline="0" dirty="0">
+                <a:ln>
+                  <a:noFill/>
+                </a:ln>
                 <a:solidFill>
-                  <a:schemeClr val="bg2">
-                    <a:lumMod val="50000"/>
-                    <a:lumOff val="50000"/>
-                  </a:schemeClr>
+                  <a:schemeClr val="tx1"/>
                 </a:solidFill>
+                <a:effectLst/>
               </a:rPr>
-              <a:t>3.Data loading in Tableau</a:t>
-            </a:r>
-          </a:p>
-          <a:p>
-            <a:pPr marL="0" indent="0">
-              <a:buNone/>
+              <a:t> The goal is to identify high-performing products, valuable customer segments, and business </a:t>
+            </a:r>
+          </a:p>
+          <a:p>
+            <a:pPr marL="0" marR="0" lvl="0" indent="0" algn="l" defTabSz="914400" rtl="0" eaLnBrk="0" fontAlgn="base" latinLnBrk="0" hangingPunct="0">
+              <a:lnSpc>
+                <a:spcPct val="100000"/>
+              </a:lnSpc>
+              <a:spcBef>
+                <a:spcPct val="0"/>
+              </a:spcBef>
+              <a:spcAft>
+                <a:spcPct val="0"/>
+              </a:spcAft>
+              <a:buClrTx/>
+              <a:buSzTx/>
+              <a:buFontTx/>
+              <a:buNone/>
+              <a:tabLst/>
             </a:pPr>
             <a:r>
-              <a:rPr lang="en-US" sz="1600" dirty="0"/>
-              <a:t>Cleaned tables imported into Tableau Desktop as data sources ready for relationship mapping</a:t>
-            </a:r>
-            <a:r>
-              <a:rPr lang="en-US" sz="1600" dirty="0">
+              <a:rPr kumimoji="0" lang="en-US" altLang="en-US" sz="1800" b="0" i="0" u="none" strike="noStrike" cap="none" normalizeH="0" baseline="0" dirty="0">
+                <a:ln>
+                  <a:noFill/>
+                </a:ln>
                 <a:solidFill>
-                  <a:srgbClr val="64748B"/>
+                  <a:schemeClr val="tx1"/>
                 </a:solidFill>
+                <a:effectLst/>
               </a:rPr>
-              <a:t>.</a:t>
-            </a:r>
-            <a:endParaRPr lang="en-US" sz="1600" dirty="0"/>
-          </a:p>
-          <a:p>
-            <a:pPr marL="0" indent="0">
-              <a:buNone/>
+              <a:t> opportunities through interactive dashboards and data-driven insights.</a:t>
+            </a:r>
+          </a:p>
+          <a:p>
+            <a:pPr marL="0" marR="0" lvl="0" indent="0" algn="l" defTabSz="914400" rtl="0" eaLnBrk="0" fontAlgn="base" latinLnBrk="0" hangingPunct="0">
+              <a:lnSpc>
+                <a:spcPct val="100000"/>
+              </a:lnSpc>
+              <a:spcBef>
+                <a:spcPct val="0"/>
+              </a:spcBef>
+              <a:spcAft>
+                <a:spcPct val="0"/>
+              </a:spcAft>
+              <a:buClrTx/>
+              <a:buSzTx/>
+              <a:buFontTx/>
+              <a:buNone/>
+              <a:tabLst/>
             </a:pPr>
-            <a:r>
-              <a:rPr lang="en-US" sz="1600" i="1" dirty="0">
-                <a:solidFill>
-                  <a:schemeClr val="bg2">
-                    <a:lumMod val="50000"/>
-                    <a:lumOff val="50000"/>
-                  </a:schemeClr>
-                </a:solidFill>
-              </a:rPr>
-              <a:t>4.Table merging in tableau</a:t>
-            </a:r>
-          </a:p>
-          <a:p>
-            <a:pPr marL="0" indent="0">
-              <a:buNone/>
-            </a:pPr>
-            <a:r>
-              <a:rPr lang="en-US" sz="1600" dirty="0"/>
-              <a:t>Tables linked via Relationships: Sales↔Customers (Customer Key), </a:t>
-            </a:r>
-            <a:r>
-              <a:rPr lang="en-US" sz="1600" dirty="0" err="1"/>
-              <a:t>Sales↔Products</a:t>
-            </a:r>
-            <a:r>
-              <a:rPr lang="en-US" sz="1600" dirty="0"/>
-              <a:t> (Product Key), </a:t>
-            </a:r>
-            <a:r>
-              <a:rPr lang="en-US" sz="1600" dirty="0" err="1"/>
-              <a:t>Sales↔Stores</a:t>
-            </a:r>
-            <a:r>
-              <a:rPr lang="en-US" sz="1600" dirty="0"/>
-              <a:t> (Store Key).</a:t>
-            </a:r>
-          </a:p>
-          <a:p>
-            <a:pPr marL="0" indent="0">
-              <a:buNone/>
-            </a:pPr>
-            <a:r>
-              <a:rPr lang="en-US" sz="1600" i="1" dirty="0">
-                <a:solidFill>
-                  <a:schemeClr val="bg2">
-                    <a:lumMod val="50000"/>
-                    <a:lumOff val="50000"/>
-                  </a:schemeClr>
-                </a:solidFill>
-              </a:rPr>
-              <a:t>5. Calculated Fields</a:t>
-            </a:r>
-          </a:p>
-          <a:p>
-            <a:pPr marL="0" indent="0">
-              <a:buNone/>
-            </a:pPr>
-            <a:r>
-              <a:rPr lang="en-US" sz="1600" dirty="0"/>
-              <a:t>Revenue, Profit, RFM Scores, Average order per customer, Average purchase per customer— built as Tableau calculated fields.</a:t>
-            </a:r>
-          </a:p>
-          <a:p>
-            <a:pPr marL="0" indent="0">
-              <a:buNone/>
-            </a:pPr>
-            <a:r>
-              <a:rPr lang="en-US" sz="1600" i="1" dirty="0">
-                <a:solidFill>
-                  <a:schemeClr val="bg2">
-                    <a:lumMod val="50000"/>
-                    <a:lumOff val="50000"/>
-                  </a:schemeClr>
-                </a:solidFill>
-              </a:rPr>
-              <a:t>6. Dashboard build</a:t>
-            </a:r>
-          </a:p>
-          <a:p>
-            <a:pPr marL="0" indent="0">
-              <a:buNone/>
-            </a:pPr>
-            <a:r>
-              <a:rPr lang="en-US" sz="1600" dirty="0"/>
-              <a:t>Two dashboards: Revenue and Profitability Dashboard + Customer Segmentation Dashboard with Parameters &amp; Sets.</a:t>
-            </a:r>
-          </a:p>
-          <a:p>
-            <a:pPr marL="0" indent="0">
-              <a:buNone/>
-            </a:pPr>
-            <a:endParaRPr lang="en-US" sz="1600" dirty="0"/>
-          </a:p>
-          <a:p>
-            <a:pPr marL="0" indent="0">
-              <a:buNone/>
-            </a:pPr>
-            <a:endParaRPr lang="en-US" dirty="0"/>
-          </a:p>
-          <a:p>
-            <a:pPr marL="457200" indent="-457200">
-              <a:buFont typeface="+mj-lt"/>
-              <a:buAutoNum type="arabicPeriod"/>
-            </a:pPr>
-            <a:endParaRPr lang="en-US" dirty="0"/>
+            <a:endParaRPr kumimoji="0" lang="en-US" altLang="en-US" sz="1800" b="0" i="0" u="none" strike="noStrike" cap="none" normalizeH="0" baseline="0" dirty="0">
+              <a:ln>
+                <a:noFill/>
+              </a:ln>
+              <a:solidFill>
+                <a:schemeClr val="tx1"/>
+              </a:solidFill>
+              <a:effectLst/>
+              <a:latin typeface="Arial" panose="020B0604020202020204" pitchFamily="34" charset="0"/>
+            </a:endParaRPr>
           </a:p>
         </p:txBody>
       </p:sp>
     </p:spTree>
     <p:extLst>
       <p:ext uri="{BB962C8B-B14F-4D97-AF65-F5344CB8AC3E}">
-        <p14:creationId xmlns:p14="http://schemas.microsoft.com/office/powerpoint/2010/main" val="2139132589"/>
+        <p14:creationId xmlns:p14="http://schemas.microsoft.com/office/powerpoint/2010/main" val="2909334953"/>
       </p:ext>
     </p:extLst>
   </p:cSld>
@@ -4465,6 +5723,323 @@
       </p:grpSpPr>
       <p:sp>
         <p:nvSpPr>
+          <p:cNvPr id="13" name="Title 12"/>
+          <p:cNvSpPr>
+            <a:spLocks noGrp="1"/>
+          </p:cNvSpPr>
+          <p:nvPr>
+            <p:ph type="title"/>
+          </p:nvPr>
+        </p:nvSpPr>
+        <p:spPr>
+          <a:xfrm>
+            <a:off x="1522413" y="559749"/>
+            <a:ext cx="9144001" cy="583251"/>
+          </a:xfrm>
+        </p:spPr>
+        <p:txBody>
+          <a:bodyPr>
+            <a:normAutofit fontScale="90000"/>
+          </a:bodyPr>
+          <a:lstStyle/>
+          <a:p>
+            <a:r>
+              <a:rPr lang="en-US" dirty="0">
+                <a:solidFill>
+                  <a:schemeClr val="tx2">
+                    <a:lumMod val="50000"/>
+                  </a:schemeClr>
+                </a:solidFill>
+              </a:rPr>
+              <a:t>PROJECT METHODOLGY</a:t>
+            </a:r>
+          </a:p>
+        </p:txBody>
+      </p:sp>
+      <p:sp>
+        <p:nvSpPr>
+          <p:cNvPr id="5" name="Content Placeholder 4">
+            <a:extLst>
+              <a:ext uri="{FF2B5EF4-FFF2-40B4-BE49-F238E27FC236}">
+                <a16:creationId xmlns:a16="http://schemas.microsoft.com/office/drawing/2014/main" id="{EBBDB624-B57F-590C-FAA3-883610C88F2A}"/>
+              </a:ext>
+            </a:extLst>
+          </p:cNvPr>
+          <p:cNvSpPr>
+            <a:spLocks noGrp="1"/>
+          </p:cNvSpPr>
+          <p:nvPr>
+            <p:ph idx="1"/>
+          </p:nvPr>
+        </p:nvSpPr>
+        <p:spPr>
+          <a:xfrm>
+            <a:off x="1065212" y="1143000"/>
+            <a:ext cx="10744200" cy="5486400"/>
+          </a:xfrm>
+        </p:spPr>
+        <p:txBody>
+          <a:bodyPr>
+            <a:normAutofit lnSpcReduction="10000"/>
+          </a:bodyPr>
+          <a:lstStyle/>
+          <a:p>
+            <a:pPr marL="0" indent="0">
+              <a:buNone/>
+            </a:pPr>
+            <a:r>
+              <a:rPr lang="en-US" sz="1600" i="1" dirty="0">
+                <a:solidFill>
+                  <a:schemeClr val="bg2">
+                    <a:lumMod val="50000"/>
+                    <a:lumOff val="50000"/>
+                  </a:schemeClr>
+                </a:solidFill>
+              </a:rPr>
+              <a:t>1.Data collection</a:t>
+            </a:r>
+          </a:p>
+          <a:p>
+            <a:pPr marL="0" indent="0">
+              <a:buNone/>
+            </a:pPr>
+            <a:r>
+              <a:rPr lang="en-US" sz="1600" dirty="0"/>
+              <a:t>Raw sales, customer, product  &amp; stores loaded into Excel across 5 worksheets</a:t>
+            </a:r>
+            <a:r>
+              <a:rPr lang="en-US" sz="1600" dirty="0">
+                <a:solidFill>
+                  <a:srgbClr val="64748B"/>
+                </a:solidFill>
+              </a:rPr>
+              <a:t>.</a:t>
+            </a:r>
+          </a:p>
+          <a:p>
+            <a:pPr marL="0" indent="0">
+              <a:buNone/>
+            </a:pPr>
+            <a:r>
+              <a:rPr lang="en-US" sz="1600" dirty="0"/>
+              <a:t>Data obtained was fictious data from Maven Analytics.</a:t>
+            </a:r>
+          </a:p>
+          <a:p>
+            <a:pPr marL="0" indent="0">
+              <a:buNone/>
+            </a:pPr>
+            <a:r>
+              <a:rPr lang="en-US" sz="1600" i="1" dirty="0">
+                <a:solidFill>
+                  <a:schemeClr val="bg2">
+                    <a:lumMod val="50000"/>
+                    <a:lumOff val="50000"/>
+                  </a:schemeClr>
+                </a:solidFill>
+              </a:rPr>
+              <a:t>2. Data cleaning in excel</a:t>
+            </a:r>
+          </a:p>
+          <a:p>
+            <a:pPr marL="0" indent="0">
+              <a:buNone/>
+            </a:pPr>
+            <a:r>
+              <a:rPr lang="en-US" sz="1400" dirty="0"/>
+              <a:t>Removed duplicates, fixed date formats, filled missing values, standardized age to  age groups.</a:t>
+            </a:r>
+          </a:p>
+          <a:p>
+            <a:pPr marL="0" indent="0">
+              <a:buNone/>
+            </a:pPr>
+            <a:r>
+              <a:rPr lang="en-US" sz="1600" i="1" dirty="0">
+                <a:solidFill>
+                  <a:schemeClr val="bg2">
+                    <a:lumMod val="50000"/>
+                    <a:lumOff val="50000"/>
+                  </a:schemeClr>
+                </a:solidFill>
+              </a:rPr>
+              <a:t>3.Data loading in Tableau</a:t>
+            </a:r>
+          </a:p>
+          <a:p>
+            <a:pPr marL="0" indent="0">
+              <a:buNone/>
+            </a:pPr>
+            <a:r>
+              <a:rPr lang="en-US" sz="1600" dirty="0"/>
+              <a:t>Cleaned tables imported into Tableau Desktop as data sources ready for relationship mapping</a:t>
+            </a:r>
+            <a:r>
+              <a:rPr lang="en-US" sz="1600" dirty="0">
+                <a:solidFill>
+                  <a:srgbClr val="64748B"/>
+                </a:solidFill>
+              </a:rPr>
+              <a:t>.</a:t>
+            </a:r>
+            <a:endParaRPr lang="en-US" sz="1600" dirty="0"/>
+          </a:p>
+          <a:p>
+            <a:pPr marL="0" indent="0">
+              <a:buNone/>
+            </a:pPr>
+            <a:r>
+              <a:rPr lang="en-US" sz="1600" i="1" dirty="0">
+                <a:solidFill>
+                  <a:schemeClr val="bg2">
+                    <a:lumMod val="50000"/>
+                    <a:lumOff val="50000"/>
+                  </a:schemeClr>
+                </a:solidFill>
+              </a:rPr>
+              <a:t>4.Table merging in tableau</a:t>
+            </a:r>
+          </a:p>
+          <a:p>
+            <a:pPr marL="0" indent="0">
+              <a:buNone/>
+            </a:pPr>
+            <a:r>
+              <a:rPr lang="en-US" sz="1600" dirty="0"/>
+              <a:t>Tables linked via Relationships: Sales↔Customers (Customer Key), </a:t>
+            </a:r>
+            <a:r>
+              <a:rPr lang="en-US" sz="1600" dirty="0" err="1"/>
+              <a:t>Sales↔Products</a:t>
+            </a:r>
+            <a:r>
+              <a:rPr lang="en-US" sz="1600" dirty="0"/>
+              <a:t> (Product Key), </a:t>
+            </a:r>
+            <a:r>
+              <a:rPr lang="en-US" sz="1600" dirty="0" err="1"/>
+              <a:t>Sales↔Stores</a:t>
+            </a:r>
+            <a:r>
+              <a:rPr lang="en-US" sz="1600" dirty="0"/>
+              <a:t> (Store Key).</a:t>
+            </a:r>
+          </a:p>
+          <a:p>
+            <a:pPr marL="0" indent="0">
+              <a:buNone/>
+            </a:pPr>
+            <a:r>
+              <a:rPr lang="en-US" sz="1600" i="1" dirty="0">
+                <a:solidFill>
+                  <a:schemeClr val="bg2">
+                    <a:lumMod val="50000"/>
+                    <a:lumOff val="50000"/>
+                  </a:schemeClr>
+                </a:solidFill>
+              </a:rPr>
+              <a:t>5. Calculated Fields</a:t>
+            </a:r>
+          </a:p>
+          <a:p>
+            <a:pPr marL="0" indent="0">
+              <a:buNone/>
+            </a:pPr>
+            <a:r>
+              <a:rPr lang="en-US" sz="1600" dirty="0"/>
+              <a:t>Revenue, Profit, RFM Scores, Average order per customer, Average purchase per customer— built as Tableau calculated fields.</a:t>
+            </a:r>
+          </a:p>
+          <a:p>
+            <a:pPr marL="0" indent="0">
+              <a:buNone/>
+            </a:pPr>
+            <a:r>
+              <a:rPr lang="en-US" sz="1600" i="1" dirty="0">
+                <a:solidFill>
+                  <a:schemeClr val="bg2">
+                    <a:lumMod val="50000"/>
+                    <a:lumOff val="50000"/>
+                  </a:schemeClr>
+                </a:solidFill>
+              </a:rPr>
+              <a:t>6. Dashboard build</a:t>
+            </a:r>
+          </a:p>
+          <a:p>
+            <a:pPr marL="0" indent="0">
+              <a:buNone/>
+            </a:pPr>
+            <a:r>
+              <a:rPr lang="en-US" sz="1600" dirty="0"/>
+              <a:t>Two dashboards: Revenue and Profitability Dashboard + Customer Segmentation Dashboard with Parameters &amp; Sets.</a:t>
+            </a:r>
+          </a:p>
+          <a:p>
+            <a:pPr marL="0" indent="0">
+              <a:buNone/>
+            </a:pPr>
+            <a:endParaRPr lang="en-US" sz="1600" dirty="0"/>
+          </a:p>
+          <a:p>
+            <a:pPr marL="0" indent="0">
+              <a:buNone/>
+            </a:pPr>
+            <a:endParaRPr lang="en-US" dirty="0"/>
+          </a:p>
+          <a:p>
+            <a:pPr marL="457200" indent="-457200">
+              <a:buFont typeface="+mj-lt"/>
+              <a:buAutoNum type="arabicPeriod"/>
+            </a:pPr>
+            <a:endParaRPr lang="en-US" dirty="0"/>
+          </a:p>
+        </p:txBody>
+      </p:sp>
+    </p:spTree>
+    <p:extLst>
+      <p:ext uri="{BB962C8B-B14F-4D97-AF65-F5344CB8AC3E}">
+        <p14:creationId xmlns:p14="http://schemas.microsoft.com/office/powerpoint/2010/main" val="2139132589"/>
+      </p:ext>
+    </p:extLst>
+  </p:cSld>
+  <p:clrMapOvr>
+    <a:masterClrMapping/>
+  </p:clrMapOvr>
+  <mc:AlternateContent xmlns:mc="http://schemas.openxmlformats.org/markup-compatibility/2006" xmlns:p14="http://schemas.microsoft.com/office/powerpoint/2010/main">
+    <mc:Choice Requires="p14">
+      <p:transition spd="med" p14:dur="700">
+        <p:fade/>
+      </p:transition>
+    </mc:Choice>
+    <mc:Fallback xmlns="">
+      <p:transition spd="med">
+        <p:fade/>
+      </p:transition>
+    </mc:Fallback>
+  </mc:AlternateContent>
+</p:sld>
+</file>
+
+<file path=ppt/slides/slide4.xml><?xml version="1.0" encoding="utf-8"?>
+<p:sld xmlns:a="http://schemas.openxmlformats.org/drawingml/2006/main" xmlns:r="http://schemas.openxmlformats.org/officeDocument/2006/relationships" xmlns:p="http://schemas.openxmlformats.org/presentationml/2006/main">
+  <p:cSld>
+    <p:spTree>
+      <p:nvGrpSpPr>
+        <p:cNvPr id="1" name=""/>
+        <p:cNvGrpSpPr/>
+        <p:nvPr/>
+      </p:nvGrpSpPr>
+      <p:grpSpPr>
+        <a:xfrm>
+          <a:off x="0" y="0"/>
+          <a:ext cx="0" cy="0"/>
+          <a:chOff x="0" y="0"/>
+          <a:chExt cx="0" cy="0"/>
+        </a:xfrm>
+      </p:grpSpPr>
+      <p:sp>
+        <p:nvSpPr>
           <p:cNvPr id="2" name="Title 1">
             <a:extLst>
               <a:ext uri="{FF2B5EF4-FFF2-40B4-BE49-F238E27FC236}">
@@ -4516,7 +6091,7 @@
             <p:ph idx="1"/>
             <p:extLst>
               <p:ext uri="{D42A27DB-BD31-4B8C-83A1-F6EECF244321}">
-                <p14:modId xmlns:p14="http://schemas.microsoft.com/office/powerpoint/2010/main" val="2007933701"/>
+                <p14:modId xmlns:p14="http://schemas.microsoft.com/office/powerpoint/2010/main" val="1026470470"/>
               </p:ext>
             </p:extLst>
           </p:nvPr>
@@ -4703,7 +6278,7 @@
                     <a:p>
                       <a:r>
                         <a:rPr lang="en-US" sz="1400" dirty="0"/>
-                        <a:t>11887</a:t>
+                        <a:t>15266</a:t>
                       </a:r>
                     </a:p>
                   </a:txBody>
@@ -4888,7 +6463,7 @@
 </p:sld>
 </file>
 
-<file path=ppt/slides/slide4.xml><?xml version="1.0" encoding="utf-8"?>
+<file path=ppt/slides/slide5.xml><?xml version="1.0" encoding="utf-8"?>
 <p:sld xmlns:a="http://schemas.openxmlformats.org/drawingml/2006/main" xmlns:r="http://schemas.openxmlformats.org/officeDocument/2006/relationships" xmlns:p="http://schemas.openxmlformats.org/presentationml/2006/main">
   <p:cSld>
     <p:spTree>
@@ -4923,8 +6498,8 @@
         </p:nvSpPr>
         <p:spPr>
           <a:xfrm>
-            <a:off x="836613" y="1219200"/>
-            <a:ext cx="3596607" cy="1371600"/>
+            <a:off x="303213" y="914400"/>
+            <a:ext cx="4130008" cy="1676400"/>
           </a:xfrm>
         </p:spPr>
         <p:txBody>
@@ -4962,12 +6537,14 @@
         </p:nvSpPr>
         <p:spPr>
           <a:xfrm>
-            <a:off x="1141412" y="2743200"/>
-            <a:ext cx="3581399" cy="762000"/>
+            <a:off x="379412" y="2743200"/>
+            <a:ext cx="4343399" cy="1828800"/>
           </a:xfrm>
         </p:spPr>
         <p:txBody>
-          <a:bodyPr/>
+          <a:bodyPr>
+            <a:normAutofit/>
+          </a:bodyPr>
           <a:lstStyle/>
           <a:p>
             <a:r>
@@ -4982,61 +6559,62 @@
               <a:t>KEY FINDINGS</a:t>
             </a:r>
           </a:p>
-        </p:txBody>
-      </p:sp>
-      <p:sp>
-        <p:nvSpPr>
-          <p:cNvPr id="4" name="Content Placeholder 3">
+          <a:p>
+            <a:r>
+              <a:rPr lang="en-US" sz="1600" dirty="0"/>
+              <a:t>Revenue grew strongly from 2016 to 2019 peaking at and there was also a sharp decline in 2020-2021 which was consistent with pandemic driven retail disruptions</a:t>
+            </a:r>
+          </a:p>
+          <a:p>
+            <a:endParaRPr lang="en-US" i="1" dirty="0">
+              <a:solidFill>
+                <a:schemeClr val="bg2">
+                  <a:lumMod val="50000"/>
+                  <a:lumOff val="50000"/>
+                </a:schemeClr>
+              </a:solidFill>
+            </a:endParaRPr>
+          </a:p>
+        </p:txBody>
+      </p:sp>
+      <p:pic>
+        <p:nvPicPr>
+          <p:cNvPr id="6" name="Content Placeholder 5">
             <a:extLst>
               <a:ext uri="{FF2B5EF4-FFF2-40B4-BE49-F238E27FC236}">
-                <a16:creationId xmlns:a16="http://schemas.microsoft.com/office/drawing/2014/main" id="{7A909CFF-F57A-6754-7D6C-7D3CDFBB1FDC}"/>
+                <a16:creationId xmlns:a16="http://schemas.microsoft.com/office/drawing/2014/main" id="{54E83C6C-533E-CA10-64D4-0D1200CAE95E}"/>
               </a:ext>
             </a:extLst>
           </p:cNvPr>
-          <p:cNvSpPr>
-            <a:spLocks noGrp="1"/>
-          </p:cNvSpPr>
+          <p:cNvPicPr>
+            <a:picLocks noGrp="1" noChangeAspect="1"/>
+          </p:cNvPicPr>
           <p:nvPr>
             <p:ph idx="1"/>
           </p:nvPr>
-        </p:nvSpPr>
+        </p:nvPicPr>
+        <p:blipFill>
+          <a:blip r:embed="rId2" cstate="print">
+            <a:extLst>
+              <a:ext uri="{28A0092B-C50C-407E-A947-70E740481C1C}">
+                <a14:useLocalDpi xmlns:a14="http://schemas.microsoft.com/office/drawing/2010/main" val="0"/>
+              </a:ext>
+            </a:extLst>
+          </a:blip>
+          <a:stretch>
+            <a:fillRect/>
+          </a:stretch>
+        </p:blipFill>
         <p:spPr>
           <a:xfrm>
-            <a:off x="4951412" y="1219200"/>
-            <a:ext cx="6400800" cy="4114800"/>
+            <a:off x="5103812" y="685800"/>
+            <a:ext cx="6934199" cy="4114800"/>
           </a:xfrm>
+          <a:prstGeom prst="rect">
+            <a:avLst/>
+          </a:prstGeom>
         </p:spPr>
-        <p:txBody>
-          <a:bodyPr>
-            <a:normAutofit/>
-          </a:bodyPr>
-          <a:lstStyle/>
-          <a:p>
-            <a:r>
-              <a:rPr lang="en-US" sz="1400" dirty="0"/>
-              <a:t>Revenue grew strongly from 2016 to 2019 peaking at and there was also a sharp decline in 2020-2021 which was consistent with pandemic driven retail disruptions</a:t>
-            </a:r>
-          </a:p>
-          <a:p>
-            <a:r>
-              <a:rPr lang="en-US" sz="1400" dirty="0"/>
-              <a:t>Computers is the largest category both in revenue and profit.</a:t>
-            </a:r>
-          </a:p>
-          <a:p>
-            <a:r>
-              <a:rPr lang="en-US" sz="1400" dirty="0"/>
-              <a:t>The united states is by far the largest market contributing to almost half of the revenue</a:t>
-            </a:r>
-          </a:p>
-          <a:p>
-            <a:r>
-              <a:rPr lang="en-US" sz="1400" dirty="0"/>
-              <a:t>More revenue was obtained from goods bought in store than those bought online, stores contributed  44.34M  while online sales were 11.4M</a:t>
-            </a:r>
-          </a:p>
-        </p:txBody>
-      </p:sp>
+      </p:pic>
     </p:spTree>
     <p:extLst>
       <p:ext uri="{BB962C8B-B14F-4D97-AF65-F5344CB8AC3E}">
@@ -5062,7 +6640,553 @@
 </p:sld>
 </file>
 
-<file path=ppt/slides/slide5.xml><?xml version="1.0" encoding="utf-8"?>
+<file path=ppt/slides/slide6.xml><?xml version="1.0" encoding="utf-8"?>
+<p:sld xmlns:a="http://schemas.openxmlformats.org/drawingml/2006/main" xmlns:r="http://schemas.openxmlformats.org/officeDocument/2006/relationships" xmlns:p="http://schemas.openxmlformats.org/presentationml/2006/main">
+  <p:cSld>
+    <p:spTree>
+      <p:nvGrpSpPr>
+        <p:cNvPr id="1" name="">
+          <a:extLst>
+            <a:ext uri="{FF2B5EF4-FFF2-40B4-BE49-F238E27FC236}">
+              <a16:creationId xmlns:a16="http://schemas.microsoft.com/office/drawing/2014/main" id="{B16F6C5E-F7DC-4FE2-8DA6-11412FA6274F}"/>
+            </a:ext>
+          </a:extLst>
+        </p:cNvPr>
+        <p:cNvGrpSpPr/>
+        <p:nvPr/>
+      </p:nvGrpSpPr>
+      <p:grpSpPr>
+        <a:xfrm>
+          <a:off x="0" y="0"/>
+          <a:ext cx="0" cy="0"/>
+          <a:chOff x="0" y="0"/>
+          <a:chExt cx="0" cy="0"/>
+        </a:xfrm>
+      </p:grpSpPr>
+      <p:sp>
+        <p:nvSpPr>
+          <p:cNvPr id="2" name="Title 1">
+            <a:extLst>
+              <a:ext uri="{FF2B5EF4-FFF2-40B4-BE49-F238E27FC236}">
+                <a16:creationId xmlns:a16="http://schemas.microsoft.com/office/drawing/2014/main" id="{A0E42C10-0C19-E17B-579D-27172E707503}"/>
+              </a:ext>
+            </a:extLst>
+          </p:cNvPr>
+          <p:cNvSpPr>
+            <a:spLocks noGrp="1"/>
+          </p:cNvSpPr>
+          <p:nvPr>
+            <p:ph type="title"/>
+          </p:nvPr>
+        </p:nvSpPr>
+        <p:spPr>
+          <a:xfrm>
+            <a:off x="303213" y="914400"/>
+            <a:ext cx="4130008" cy="1676400"/>
+          </a:xfrm>
+        </p:spPr>
+        <p:txBody>
+          <a:bodyPr/>
+          <a:lstStyle/>
+          <a:p>
+            <a:r>
+              <a:rPr lang="en-US" dirty="0">
+                <a:solidFill>
+                  <a:schemeClr val="tx2">
+                    <a:lumMod val="50000"/>
+                  </a:schemeClr>
+                </a:solidFill>
+              </a:rPr>
+              <a:t>REVENUE AND PROFITABILTY ANALYSIS</a:t>
+            </a:r>
+          </a:p>
+        </p:txBody>
+      </p:sp>
+      <p:sp>
+        <p:nvSpPr>
+          <p:cNvPr id="3" name="Text Placeholder 2">
+            <a:extLst>
+              <a:ext uri="{FF2B5EF4-FFF2-40B4-BE49-F238E27FC236}">
+                <a16:creationId xmlns:a16="http://schemas.microsoft.com/office/drawing/2014/main" id="{826B0BBF-BE96-A529-B290-584565641E84}"/>
+              </a:ext>
+            </a:extLst>
+          </p:cNvPr>
+          <p:cNvSpPr>
+            <a:spLocks noGrp="1"/>
+          </p:cNvSpPr>
+          <p:nvPr>
+            <p:ph type="body" sz="half" idx="2"/>
+          </p:nvPr>
+        </p:nvSpPr>
+        <p:spPr>
+          <a:xfrm>
+            <a:off x="379412" y="2743200"/>
+            <a:ext cx="4343399" cy="1828800"/>
+          </a:xfrm>
+        </p:spPr>
+        <p:txBody>
+          <a:bodyPr>
+            <a:normAutofit/>
+          </a:bodyPr>
+          <a:lstStyle/>
+          <a:p>
+            <a:r>
+              <a:rPr lang="en-US" i="1" dirty="0">
+                <a:solidFill>
+                  <a:schemeClr val="bg2">
+                    <a:lumMod val="50000"/>
+                    <a:lumOff val="50000"/>
+                  </a:schemeClr>
+                </a:solidFill>
+              </a:rPr>
+              <a:t>KEY FINDINGS</a:t>
+            </a:r>
+          </a:p>
+          <a:p>
+            <a:r>
+              <a:rPr lang="en-US" dirty="0"/>
+              <a:t>Computers is the largest category both in revenue and profit.</a:t>
+            </a:r>
+          </a:p>
+          <a:p>
+            <a:endParaRPr lang="en-US" i="1" dirty="0">
+              <a:solidFill>
+                <a:schemeClr val="bg2">
+                  <a:lumMod val="50000"/>
+                  <a:lumOff val="50000"/>
+                </a:schemeClr>
+              </a:solidFill>
+            </a:endParaRPr>
+          </a:p>
+        </p:txBody>
+      </p:sp>
+      <p:pic>
+        <p:nvPicPr>
+          <p:cNvPr id="6" name="Content Placeholder 5">
+            <a:extLst>
+              <a:ext uri="{FF2B5EF4-FFF2-40B4-BE49-F238E27FC236}">
+                <a16:creationId xmlns:a16="http://schemas.microsoft.com/office/drawing/2014/main" id="{0FAF77DB-9CAB-D0FF-42C4-EDB810F7612C}"/>
+              </a:ext>
+            </a:extLst>
+          </p:cNvPr>
+          <p:cNvPicPr>
+            <a:picLocks noGrp="1" noChangeAspect="1"/>
+          </p:cNvPicPr>
+          <p:nvPr>
+            <p:ph idx="1"/>
+          </p:nvPr>
+        </p:nvPicPr>
+        <p:blipFill>
+          <a:blip r:embed="rId2">
+            <a:extLst>
+              <a:ext uri="{28A0092B-C50C-407E-A947-70E740481C1C}">
+                <a14:useLocalDpi xmlns:a14="http://schemas.microsoft.com/office/drawing/2010/main" val="0"/>
+              </a:ext>
+            </a:extLst>
+          </a:blip>
+          <a:srcRect/>
+          <a:stretch/>
+        </p:blipFill>
+        <p:spPr>
+          <a:xfrm>
+            <a:off x="4951413" y="457200"/>
+            <a:ext cx="6858000" cy="6095999"/>
+          </a:xfrm>
+          <a:prstGeom prst="rect">
+            <a:avLst/>
+          </a:prstGeom>
+        </p:spPr>
+      </p:pic>
+    </p:spTree>
+    <p:extLst>
+      <p:ext uri="{BB962C8B-B14F-4D97-AF65-F5344CB8AC3E}">
+        <p14:creationId xmlns:p14="http://schemas.microsoft.com/office/powerpoint/2010/main" val="811661640"/>
+      </p:ext>
+    </p:extLst>
+  </p:cSld>
+  <p:clrMapOvr>
+    <a:masterClrMapping/>
+  </p:clrMapOvr>
+  <mc:AlternateContent xmlns:mc="http://schemas.openxmlformats.org/markup-compatibility/2006">
+    <mc:Choice xmlns:p14="http://schemas.microsoft.com/office/powerpoint/2010/main" Requires="p14">
+      <p:transition spd="med" p14:dur="700">
+        <p:fade/>
+      </p:transition>
+    </mc:Choice>
+    <mc:Fallback>
+      <p:transition spd="med">
+        <p:fade/>
+      </p:transition>
+    </mc:Fallback>
+  </mc:AlternateContent>
+</p:sld>
+</file>
+
+<file path=ppt/slides/slide7.xml><?xml version="1.0" encoding="utf-8"?>
+<p:sld xmlns:a="http://schemas.openxmlformats.org/drawingml/2006/main" xmlns:r="http://schemas.openxmlformats.org/officeDocument/2006/relationships" xmlns:p="http://schemas.openxmlformats.org/presentationml/2006/main">
+  <p:cSld>
+    <p:spTree>
+      <p:nvGrpSpPr>
+        <p:cNvPr id="1" name="">
+          <a:extLst>
+            <a:ext uri="{FF2B5EF4-FFF2-40B4-BE49-F238E27FC236}">
+              <a16:creationId xmlns:a16="http://schemas.microsoft.com/office/drawing/2014/main" id="{D512A0B9-2910-6581-7E06-E47A9305FBA3}"/>
+            </a:ext>
+          </a:extLst>
+        </p:cNvPr>
+        <p:cNvGrpSpPr/>
+        <p:nvPr/>
+      </p:nvGrpSpPr>
+      <p:grpSpPr>
+        <a:xfrm>
+          <a:off x="0" y="0"/>
+          <a:ext cx="0" cy="0"/>
+          <a:chOff x="0" y="0"/>
+          <a:chExt cx="0" cy="0"/>
+        </a:xfrm>
+      </p:grpSpPr>
+      <p:sp>
+        <p:nvSpPr>
+          <p:cNvPr id="2" name="Title 1">
+            <a:extLst>
+              <a:ext uri="{FF2B5EF4-FFF2-40B4-BE49-F238E27FC236}">
+                <a16:creationId xmlns:a16="http://schemas.microsoft.com/office/drawing/2014/main" id="{2048EFB8-55D2-5561-6EF4-83AF2AFDADF2}"/>
+              </a:ext>
+            </a:extLst>
+          </p:cNvPr>
+          <p:cNvSpPr>
+            <a:spLocks noGrp="1"/>
+          </p:cNvSpPr>
+          <p:nvPr>
+            <p:ph type="title"/>
+          </p:nvPr>
+        </p:nvSpPr>
+        <p:spPr>
+          <a:xfrm>
+            <a:off x="303213" y="914400"/>
+            <a:ext cx="4130008" cy="1676400"/>
+          </a:xfrm>
+        </p:spPr>
+        <p:txBody>
+          <a:bodyPr/>
+          <a:lstStyle/>
+          <a:p>
+            <a:r>
+              <a:rPr lang="en-US" dirty="0">
+                <a:solidFill>
+                  <a:schemeClr val="tx2">
+                    <a:lumMod val="50000"/>
+                  </a:schemeClr>
+                </a:solidFill>
+              </a:rPr>
+              <a:t>REVENUE AND PROFITABILTY ANALYSIS</a:t>
+            </a:r>
+          </a:p>
+        </p:txBody>
+      </p:sp>
+      <p:sp>
+        <p:nvSpPr>
+          <p:cNvPr id="3" name="Text Placeholder 2">
+            <a:extLst>
+              <a:ext uri="{FF2B5EF4-FFF2-40B4-BE49-F238E27FC236}">
+                <a16:creationId xmlns:a16="http://schemas.microsoft.com/office/drawing/2014/main" id="{57DDD478-88D3-4784-9EA1-9EB18D905AA6}"/>
+              </a:ext>
+            </a:extLst>
+          </p:cNvPr>
+          <p:cNvSpPr>
+            <a:spLocks noGrp="1"/>
+          </p:cNvSpPr>
+          <p:nvPr>
+            <p:ph type="body" sz="half" idx="2"/>
+          </p:nvPr>
+        </p:nvSpPr>
+        <p:spPr>
+          <a:xfrm>
+            <a:off x="379412" y="2743200"/>
+            <a:ext cx="4343399" cy="1828800"/>
+          </a:xfrm>
+        </p:spPr>
+        <p:txBody>
+          <a:bodyPr>
+            <a:normAutofit/>
+          </a:bodyPr>
+          <a:lstStyle/>
+          <a:p>
+            <a:r>
+              <a:rPr lang="en-US" i="1" dirty="0">
+                <a:solidFill>
+                  <a:schemeClr val="bg2">
+                    <a:lumMod val="50000"/>
+                    <a:lumOff val="50000"/>
+                  </a:schemeClr>
+                </a:solidFill>
+              </a:rPr>
+              <a:t>KEY FINDINGS</a:t>
+            </a:r>
+          </a:p>
+          <a:p>
+            <a:r>
+              <a:rPr lang="en-US" dirty="0"/>
+              <a:t>The united states is by far the largest market contributing to almost half of the revenue</a:t>
+            </a:r>
+          </a:p>
+          <a:p>
+            <a:endParaRPr lang="en-US" i="1" dirty="0">
+              <a:solidFill>
+                <a:schemeClr val="bg2">
+                  <a:lumMod val="50000"/>
+                  <a:lumOff val="50000"/>
+                </a:schemeClr>
+              </a:solidFill>
+            </a:endParaRPr>
+          </a:p>
+        </p:txBody>
+      </p:sp>
+      <p:pic>
+        <p:nvPicPr>
+          <p:cNvPr id="6" name="Content Placeholder 5">
+            <a:extLst>
+              <a:ext uri="{FF2B5EF4-FFF2-40B4-BE49-F238E27FC236}">
+                <a16:creationId xmlns:a16="http://schemas.microsoft.com/office/drawing/2014/main" id="{CD0AC97C-727A-E491-07C1-5C3620CB6FE7}"/>
+              </a:ext>
+            </a:extLst>
+          </p:cNvPr>
+          <p:cNvPicPr>
+            <a:picLocks noGrp="1" noChangeAspect="1"/>
+          </p:cNvPicPr>
+          <p:nvPr>
+            <p:ph idx="1"/>
+          </p:nvPr>
+        </p:nvPicPr>
+        <p:blipFill>
+          <a:blip r:embed="rId2">
+            <a:extLst>
+              <a:ext uri="{28A0092B-C50C-407E-A947-70E740481C1C}">
+                <a14:useLocalDpi xmlns:a14="http://schemas.microsoft.com/office/drawing/2010/main" val="0"/>
+              </a:ext>
+            </a:extLst>
+          </a:blip>
+          <a:srcRect/>
+          <a:stretch/>
+        </p:blipFill>
+        <p:spPr>
+          <a:xfrm>
+            <a:off x="4875212" y="457200"/>
+            <a:ext cx="6400800" cy="4572000"/>
+          </a:xfrm>
+          <a:prstGeom prst="rect">
+            <a:avLst/>
+          </a:prstGeom>
+        </p:spPr>
+      </p:pic>
+    </p:spTree>
+    <p:extLst>
+      <p:ext uri="{BB962C8B-B14F-4D97-AF65-F5344CB8AC3E}">
+        <p14:creationId xmlns:p14="http://schemas.microsoft.com/office/powerpoint/2010/main" val="3711023116"/>
+      </p:ext>
+    </p:extLst>
+  </p:cSld>
+  <p:clrMapOvr>
+    <a:masterClrMapping/>
+  </p:clrMapOvr>
+  <mc:AlternateContent xmlns:mc="http://schemas.openxmlformats.org/markup-compatibility/2006">
+    <mc:Choice xmlns:p14="http://schemas.microsoft.com/office/powerpoint/2010/main" Requires="p14">
+      <p:transition spd="med" p14:dur="700">
+        <p:fade/>
+      </p:transition>
+    </mc:Choice>
+    <mc:Fallback>
+      <p:transition spd="med">
+        <p:fade/>
+      </p:transition>
+    </mc:Fallback>
+  </mc:AlternateContent>
+</p:sld>
+</file>
+
+<file path=ppt/slides/slide8.xml><?xml version="1.0" encoding="utf-8"?>
+<p:sld xmlns:a="http://schemas.openxmlformats.org/drawingml/2006/main" xmlns:r="http://schemas.openxmlformats.org/officeDocument/2006/relationships" xmlns:p="http://schemas.openxmlformats.org/presentationml/2006/main">
+  <p:cSld>
+    <p:spTree>
+      <p:nvGrpSpPr>
+        <p:cNvPr id="1" name="">
+          <a:extLst>
+            <a:ext uri="{FF2B5EF4-FFF2-40B4-BE49-F238E27FC236}">
+              <a16:creationId xmlns:a16="http://schemas.microsoft.com/office/drawing/2014/main" id="{BD50ECD6-062F-69ED-DEBC-A540E21F510C}"/>
+            </a:ext>
+          </a:extLst>
+        </p:cNvPr>
+        <p:cNvGrpSpPr/>
+        <p:nvPr/>
+      </p:nvGrpSpPr>
+      <p:grpSpPr>
+        <a:xfrm>
+          <a:off x="0" y="0"/>
+          <a:ext cx="0" cy="0"/>
+          <a:chOff x="0" y="0"/>
+          <a:chExt cx="0" cy="0"/>
+        </a:xfrm>
+      </p:grpSpPr>
+      <p:sp>
+        <p:nvSpPr>
+          <p:cNvPr id="2" name="Title 1">
+            <a:extLst>
+              <a:ext uri="{FF2B5EF4-FFF2-40B4-BE49-F238E27FC236}">
+                <a16:creationId xmlns:a16="http://schemas.microsoft.com/office/drawing/2014/main" id="{66013031-72D3-0E18-108B-06B6C19939A2}"/>
+              </a:ext>
+            </a:extLst>
+          </p:cNvPr>
+          <p:cNvSpPr>
+            <a:spLocks noGrp="1"/>
+          </p:cNvSpPr>
+          <p:nvPr>
+            <p:ph type="title"/>
+          </p:nvPr>
+        </p:nvSpPr>
+        <p:spPr>
+          <a:xfrm>
+            <a:off x="303213" y="914400"/>
+            <a:ext cx="4130008" cy="1676400"/>
+          </a:xfrm>
+        </p:spPr>
+        <p:txBody>
+          <a:bodyPr/>
+          <a:lstStyle/>
+          <a:p>
+            <a:r>
+              <a:rPr lang="en-US" dirty="0">
+                <a:solidFill>
+                  <a:schemeClr val="tx2">
+                    <a:lumMod val="50000"/>
+                  </a:schemeClr>
+                </a:solidFill>
+              </a:rPr>
+              <a:t>REVENUE AND PROFITABILTY ANALYSIS</a:t>
+            </a:r>
+          </a:p>
+        </p:txBody>
+      </p:sp>
+      <p:sp>
+        <p:nvSpPr>
+          <p:cNvPr id="3" name="Text Placeholder 2">
+            <a:extLst>
+              <a:ext uri="{FF2B5EF4-FFF2-40B4-BE49-F238E27FC236}">
+                <a16:creationId xmlns:a16="http://schemas.microsoft.com/office/drawing/2014/main" id="{BD95F602-8878-66CF-FAE1-2947C77CA700}"/>
+              </a:ext>
+            </a:extLst>
+          </p:cNvPr>
+          <p:cNvSpPr>
+            <a:spLocks noGrp="1"/>
+          </p:cNvSpPr>
+          <p:nvPr>
+            <p:ph type="body" sz="half" idx="2"/>
+          </p:nvPr>
+        </p:nvSpPr>
+        <p:spPr>
+          <a:xfrm>
+            <a:off x="379412" y="2743200"/>
+            <a:ext cx="4343399" cy="1828800"/>
+          </a:xfrm>
+        </p:spPr>
+        <p:txBody>
+          <a:bodyPr>
+            <a:normAutofit/>
+          </a:bodyPr>
+          <a:lstStyle/>
+          <a:p>
+            <a:r>
+              <a:rPr lang="en-US" i="1" dirty="0">
+                <a:solidFill>
+                  <a:schemeClr val="bg2">
+                    <a:lumMod val="50000"/>
+                    <a:lumOff val="50000"/>
+                  </a:schemeClr>
+                </a:solidFill>
+              </a:rPr>
+              <a:t>KEY FINDINGS</a:t>
+            </a:r>
+          </a:p>
+          <a:p>
+            <a:r>
+              <a:rPr lang="en-US" dirty="0"/>
+              <a:t>More revenue was obtained from goods bought in store than those bought online, stores contributed  44.34M  while online sales were 11.4M</a:t>
+            </a:r>
+          </a:p>
+          <a:p>
+            <a:endParaRPr lang="en-US" i="1" dirty="0">
+              <a:solidFill>
+                <a:schemeClr val="bg2">
+                  <a:lumMod val="50000"/>
+                  <a:lumOff val="50000"/>
+                </a:schemeClr>
+              </a:solidFill>
+            </a:endParaRPr>
+          </a:p>
+        </p:txBody>
+      </p:sp>
+      <p:pic>
+        <p:nvPicPr>
+          <p:cNvPr id="10" name="Content Placeholder 9">
+            <a:extLst>
+              <a:ext uri="{FF2B5EF4-FFF2-40B4-BE49-F238E27FC236}">
+                <a16:creationId xmlns:a16="http://schemas.microsoft.com/office/drawing/2014/main" id="{DE672599-853B-1C56-8BA9-DD7E6C80486B}"/>
+              </a:ext>
+            </a:extLst>
+          </p:cNvPr>
+          <p:cNvPicPr>
+            <a:picLocks noGrp="1" noChangeAspect="1"/>
+          </p:cNvPicPr>
+          <p:nvPr>
+            <p:ph idx="1"/>
+          </p:nvPr>
+        </p:nvPicPr>
+        <p:blipFill>
+          <a:blip r:embed="rId2" cstate="print">
+            <a:extLst>
+              <a:ext uri="{28A0092B-C50C-407E-A947-70E740481C1C}">
+                <a14:useLocalDpi xmlns:a14="http://schemas.microsoft.com/office/drawing/2010/main" val="0"/>
+              </a:ext>
+            </a:extLst>
+          </a:blip>
+          <a:srcRect/>
+          <a:stretch/>
+        </p:blipFill>
+        <p:spPr>
+          <a:xfrm>
+            <a:off x="5180012" y="1295400"/>
+            <a:ext cx="6400800" cy="3600449"/>
+          </a:xfrm>
+          <a:prstGeom prst="rect">
+            <a:avLst/>
+          </a:prstGeom>
+        </p:spPr>
+      </p:pic>
+    </p:spTree>
+    <p:extLst>
+      <p:ext uri="{BB962C8B-B14F-4D97-AF65-F5344CB8AC3E}">
+        <p14:creationId xmlns:p14="http://schemas.microsoft.com/office/powerpoint/2010/main" val="1750678685"/>
+      </p:ext>
+    </p:extLst>
+  </p:cSld>
+  <p:clrMapOvr>
+    <a:masterClrMapping/>
+  </p:clrMapOvr>
+  <mc:AlternateContent xmlns:mc="http://schemas.openxmlformats.org/markup-compatibility/2006">
+    <mc:Choice xmlns:p14="http://schemas.microsoft.com/office/powerpoint/2010/main" Requires="p14">
+      <p:transition spd="med" p14:dur="700">
+        <p:fade/>
+      </p:transition>
+    </mc:Choice>
+    <mc:Fallback>
+      <p:transition spd="med">
+        <p:fade/>
+      </p:transition>
+    </mc:Fallback>
+  </mc:AlternateContent>
+</p:sld>
+</file>
+
+<file path=ppt/slides/slide9.xml><?xml version="1.0" encoding="utf-8"?>
 <p:sld xmlns:a="http://schemas.openxmlformats.org/drawingml/2006/main" xmlns:r="http://schemas.openxmlformats.org/officeDocument/2006/relationships" xmlns:p="http://schemas.openxmlformats.org/presentationml/2006/main">
   <p:cSld>
     <p:spTree>
@@ -5159,660 +7283,6 @@
     <p:extLst>
       <p:ext uri="{BB962C8B-B14F-4D97-AF65-F5344CB8AC3E}">
         <p14:creationId xmlns:p14="http://schemas.microsoft.com/office/powerpoint/2010/main" val="3949292942"/>
-      </p:ext>
-    </p:extLst>
-  </p:cSld>
-  <p:clrMapOvr>
-    <a:masterClrMapping/>
-  </p:clrMapOvr>
-  <mc:AlternateContent xmlns:mc="http://schemas.openxmlformats.org/markup-compatibility/2006" xmlns:p14="http://schemas.microsoft.com/office/powerpoint/2010/main">
-    <mc:Choice Requires="p14">
-      <p:transition spd="med" p14:dur="700">
-        <p:fade/>
-      </p:transition>
-    </mc:Choice>
-    <mc:Fallback xmlns="">
-      <p:transition spd="med">
-        <p:fade/>
-      </p:transition>
-    </mc:Fallback>
-  </mc:AlternateContent>
-</p:sld>
-</file>
-
-<file path=ppt/slides/slide6.xml><?xml version="1.0" encoding="utf-8"?>
-<p:sld xmlns:a="http://schemas.openxmlformats.org/drawingml/2006/main" xmlns:r="http://schemas.openxmlformats.org/officeDocument/2006/relationships" xmlns:p="http://schemas.openxmlformats.org/presentationml/2006/main">
-  <p:cSld>
-    <p:spTree>
-      <p:nvGrpSpPr>
-        <p:cNvPr id="1" name=""/>
-        <p:cNvGrpSpPr/>
-        <p:nvPr/>
-      </p:nvGrpSpPr>
-      <p:grpSpPr>
-        <a:xfrm>
-          <a:off x="0" y="0"/>
-          <a:ext cx="0" cy="0"/>
-          <a:chOff x="0" y="0"/>
-          <a:chExt cx="0" cy="0"/>
-        </a:xfrm>
-      </p:grpSpPr>
-      <p:sp>
-        <p:nvSpPr>
-          <p:cNvPr id="2" name="Title 1"/>
-          <p:cNvSpPr>
-            <a:spLocks noGrp="1"/>
-          </p:cNvSpPr>
-          <p:nvPr>
-            <p:ph type="title"/>
-          </p:nvPr>
-        </p:nvSpPr>
-        <p:spPr>
-          <a:xfrm>
-            <a:off x="684212" y="838200"/>
-            <a:ext cx="3967999" cy="1600200"/>
-          </a:xfrm>
-        </p:spPr>
-        <p:txBody>
-          <a:bodyPr/>
-          <a:lstStyle/>
-          <a:p>
-            <a:r>
-              <a:rPr lang="en-US" dirty="0">
-                <a:solidFill>
-                  <a:schemeClr val="accent1"/>
-                </a:solidFill>
-              </a:rPr>
-              <a:t>CUSTOMER SEGMENTATION</a:t>
-            </a:r>
-            <a:br>
-              <a:rPr lang="en-US" dirty="0">
-                <a:solidFill>
-                  <a:schemeClr val="accent1"/>
-                </a:solidFill>
-              </a:rPr>
-            </a:br>
-            <a:r>
-              <a:rPr lang="en-US" dirty="0">
-                <a:solidFill>
-                  <a:schemeClr val="accent1"/>
-                </a:solidFill>
-              </a:rPr>
-              <a:t>ANALYSIS</a:t>
-            </a:r>
-          </a:p>
-        </p:txBody>
-      </p:sp>
-      <p:sp>
-        <p:nvSpPr>
-          <p:cNvPr id="8" name="Text Placeholder 7">
-            <a:extLst>
-              <a:ext uri="{FF2B5EF4-FFF2-40B4-BE49-F238E27FC236}">
-                <a16:creationId xmlns:a16="http://schemas.microsoft.com/office/drawing/2014/main" id="{FA7D2099-B303-A5B4-48AD-4B1914621BA1}"/>
-              </a:ext>
-            </a:extLst>
-          </p:cNvPr>
-          <p:cNvSpPr>
-            <a:spLocks noGrp="1"/>
-          </p:cNvSpPr>
-          <p:nvPr>
-            <p:ph type="body" sz="half" idx="2"/>
-          </p:nvPr>
-        </p:nvSpPr>
-        <p:spPr>
-          <a:xfrm>
-            <a:off x="836611" y="2819400"/>
-            <a:ext cx="3810001" cy="533400"/>
-          </a:xfrm>
-        </p:spPr>
-        <p:txBody>
-          <a:bodyPr/>
-          <a:lstStyle/>
-          <a:p>
-            <a:r>
-              <a:rPr lang="en-US" dirty="0">
-                <a:solidFill>
-                  <a:schemeClr val="bg2">
-                    <a:lumMod val="50000"/>
-                    <a:lumOff val="50000"/>
-                  </a:schemeClr>
-                </a:solidFill>
-              </a:rPr>
-              <a:t>KEY FINDINGS</a:t>
-            </a:r>
-          </a:p>
-        </p:txBody>
-      </p:sp>
-      <p:sp>
-        <p:nvSpPr>
-          <p:cNvPr id="7" name="Content Placeholder 6">
-            <a:extLst>
-              <a:ext uri="{FF2B5EF4-FFF2-40B4-BE49-F238E27FC236}">
-                <a16:creationId xmlns:a16="http://schemas.microsoft.com/office/drawing/2014/main" id="{718085D8-34BD-31AE-4252-234A3203EECA}"/>
-              </a:ext>
-            </a:extLst>
-          </p:cNvPr>
-          <p:cNvSpPr>
-            <a:spLocks noGrp="1"/>
-          </p:cNvSpPr>
-          <p:nvPr>
-            <p:ph idx="1"/>
-          </p:nvPr>
-        </p:nvSpPr>
-        <p:spPr/>
-        <p:txBody>
-          <a:bodyPr/>
-          <a:lstStyle/>
-          <a:p>
-            <a:r>
-              <a:rPr lang="en-US" sz="1400" dirty="0"/>
-              <a:t>The total number of customers  was  11,887 with an average spending of  4.69k USD ,  with an average order of 2 items per customer</a:t>
-            </a:r>
-          </a:p>
-          <a:p>
-            <a:r>
-              <a:rPr lang="en-US" sz="1400" dirty="0"/>
-              <a:t>Senior and Middle-aged customers account for 76.8% revenue suggesting a loyal, higher spending demographic that should be targeted for premium product marketing</a:t>
-            </a:r>
-          </a:p>
-          <a:p>
-            <a:r>
-              <a:rPr lang="en-US" sz="1400" dirty="0"/>
-              <a:t>Revenue is almost evenly split between male and female customers indicating gender neutral appeal of the product range</a:t>
-            </a:r>
-          </a:p>
-          <a:p>
-            <a:r>
-              <a:rPr lang="en-US" sz="1400" dirty="0"/>
-              <a:t>The united states is by far the highest largest market contributing almost half of the revenue with 6885 customers</a:t>
-            </a:r>
-          </a:p>
-          <a:p>
-            <a:pPr marL="0" indent="0">
-              <a:buNone/>
-            </a:pPr>
-            <a:endParaRPr lang="en-US" dirty="0"/>
-          </a:p>
-        </p:txBody>
-      </p:sp>
-    </p:spTree>
-    <p:extLst>
-      <p:ext uri="{BB962C8B-B14F-4D97-AF65-F5344CB8AC3E}">
-        <p14:creationId xmlns:p14="http://schemas.microsoft.com/office/powerpoint/2010/main" val="2681425051"/>
-      </p:ext>
-    </p:extLst>
-  </p:cSld>
-  <p:clrMapOvr>
-    <a:masterClrMapping/>
-  </p:clrMapOvr>
-  <mc:AlternateContent xmlns:mc="http://schemas.openxmlformats.org/markup-compatibility/2006" xmlns:p14="http://schemas.microsoft.com/office/powerpoint/2010/main">
-    <mc:Choice Requires="p14">
-      <p:transition spd="med" p14:dur="700">
-        <p:fade/>
-      </p:transition>
-    </mc:Choice>
-    <mc:Fallback xmlns="">
-      <p:transition spd="med">
-        <p:fade/>
-      </p:transition>
-    </mc:Fallback>
-  </mc:AlternateContent>
-</p:sld>
-</file>
-
-<file path=ppt/slides/slide7.xml><?xml version="1.0" encoding="utf-8"?>
-<p:sld xmlns:a="http://schemas.openxmlformats.org/drawingml/2006/main" xmlns:r="http://schemas.openxmlformats.org/officeDocument/2006/relationships" xmlns:p="http://schemas.openxmlformats.org/presentationml/2006/main">
-  <p:cSld>
-    <p:spTree>
-      <p:nvGrpSpPr>
-        <p:cNvPr id="1" name=""/>
-        <p:cNvGrpSpPr/>
-        <p:nvPr/>
-      </p:nvGrpSpPr>
-      <p:grpSpPr>
-        <a:xfrm>
-          <a:off x="0" y="0"/>
-          <a:ext cx="0" cy="0"/>
-          <a:chOff x="0" y="0"/>
-          <a:chExt cx="0" cy="0"/>
-        </a:xfrm>
-      </p:grpSpPr>
-      <p:sp>
-        <p:nvSpPr>
-          <p:cNvPr id="2" name="Title 1"/>
-          <p:cNvSpPr>
-            <a:spLocks noGrp="1"/>
-          </p:cNvSpPr>
-          <p:nvPr>
-            <p:ph type="title"/>
-          </p:nvPr>
-        </p:nvSpPr>
-        <p:spPr>
-          <a:xfrm>
-            <a:off x="227013" y="76200"/>
-            <a:ext cx="10439402" cy="533400"/>
-          </a:xfrm>
-        </p:spPr>
-        <p:txBody>
-          <a:bodyPr>
-            <a:normAutofit fontScale="90000"/>
-          </a:bodyPr>
-          <a:lstStyle/>
-          <a:p>
-            <a:r>
-              <a:rPr lang="en-US" dirty="0">
-                <a:solidFill>
-                  <a:schemeClr val="accent1"/>
-                </a:solidFill>
-              </a:rPr>
-              <a:t>CUSTOMER SEGMANTATION ANALYSIS</a:t>
-            </a:r>
-          </a:p>
-        </p:txBody>
-      </p:sp>
-      <p:pic>
-        <p:nvPicPr>
-          <p:cNvPr id="6" name="Content Placeholder 5">
-            <a:extLst>
-              <a:ext uri="{FF2B5EF4-FFF2-40B4-BE49-F238E27FC236}">
-                <a16:creationId xmlns:a16="http://schemas.microsoft.com/office/drawing/2014/main" id="{2E4D62A9-53BD-C241-358B-EAF5B20A3566}"/>
-              </a:ext>
-            </a:extLst>
-          </p:cNvPr>
-          <p:cNvPicPr>
-            <a:picLocks noGrp="1" noChangeAspect="1"/>
-          </p:cNvPicPr>
-          <p:nvPr>
-            <p:ph idx="1"/>
-          </p:nvPr>
-        </p:nvPicPr>
-        <p:blipFill>
-          <a:blip r:embed="rId2">
-            <a:extLst>
-              <a:ext uri="{28A0092B-C50C-407E-A947-70E740481C1C}">
-                <a14:useLocalDpi xmlns:a14="http://schemas.microsoft.com/office/drawing/2010/main" val="0"/>
-              </a:ext>
-            </a:extLst>
-          </a:blip>
-          <a:srcRect/>
-          <a:stretch/>
-        </p:blipFill>
-        <p:spPr>
-          <a:xfrm>
-            <a:off x="0" y="609600"/>
-            <a:ext cx="12114211" cy="6172200"/>
-          </a:xfrm>
-          <a:prstGeom prst="rect">
-            <a:avLst/>
-          </a:prstGeom>
-        </p:spPr>
-      </p:pic>
-    </p:spTree>
-    <p:extLst>
-      <p:ext uri="{BB962C8B-B14F-4D97-AF65-F5344CB8AC3E}">
-        <p14:creationId xmlns:p14="http://schemas.microsoft.com/office/powerpoint/2010/main" val="2590506655"/>
-      </p:ext>
-    </p:extLst>
-  </p:cSld>
-  <p:clrMapOvr>
-    <a:masterClrMapping/>
-  </p:clrMapOvr>
-  <mc:AlternateContent xmlns:mc="http://schemas.openxmlformats.org/markup-compatibility/2006" xmlns:p14="http://schemas.microsoft.com/office/powerpoint/2010/main">
-    <mc:Choice Requires="p14">
-      <p:transition spd="med" p14:dur="700">
-        <p:fade/>
-      </p:transition>
-    </mc:Choice>
-    <mc:Fallback xmlns="">
-      <p:transition spd="med">
-        <p:fade/>
-      </p:transition>
-    </mc:Fallback>
-  </mc:AlternateContent>
-</p:sld>
-</file>
-
-<file path=ppt/slides/slide8.xml><?xml version="1.0" encoding="utf-8"?>
-<p:sld xmlns:a="http://schemas.openxmlformats.org/drawingml/2006/main" xmlns:r="http://schemas.openxmlformats.org/officeDocument/2006/relationships" xmlns:p="http://schemas.openxmlformats.org/presentationml/2006/main">
-  <p:cSld>
-    <p:spTree>
-      <p:nvGrpSpPr>
-        <p:cNvPr id="1" name=""/>
-        <p:cNvGrpSpPr/>
-        <p:nvPr/>
-      </p:nvGrpSpPr>
-      <p:grpSpPr>
-        <a:xfrm>
-          <a:off x="0" y="0"/>
-          <a:ext cx="0" cy="0"/>
-          <a:chOff x="0" y="0"/>
-          <a:chExt cx="0" cy="0"/>
-        </a:xfrm>
-      </p:grpSpPr>
-      <p:sp>
-        <p:nvSpPr>
-          <p:cNvPr id="2" name="Title 1">
-            <a:extLst>
-              <a:ext uri="{FF2B5EF4-FFF2-40B4-BE49-F238E27FC236}">
-                <a16:creationId xmlns:a16="http://schemas.microsoft.com/office/drawing/2014/main" id="{69B1DB6C-B587-28F8-17C7-56D2BC66372A}"/>
-              </a:ext>
-            </a:extLst>
-          </p:cNvPr>
-          <p:cNvSpPr>
-            <a:spLocks noGrp="1"/>
-          </p:cNvSpPr>
-          <p:nvPr>
-            <p:ph type="title"/>
-          </p:nvPr>
-        </p:nvSpPr>
-        <p:spPr>
-          <a:xfrm>
-            <a:off x="1522413" y="381000"/>
-            <a:ext cx="9144001" cy="609600"/>
-          </a:xfrm>
-        </p:spPr>
-        <p:txBody>
-          <a:bodyPr/>
-          <a:lstStyle/>
-          <a:p>
-            <a:r>
-              <a:rPr lang="en-US" dirty="0">
-                <a:solidFill>
-                  <a:schemeClr val="accent1"/>
-                </a:solidFill>
-              </a:rPr>
-              <a:t>Key Recommendations</a:t>
-            </a:r>
-          </a:p>
-        </p:txBody>
-      </p:sp>
-      <p:sp>
-        <p:nvSpPr>
-          <p:cNvPr id="3" name="Content Placeholder 2">
-            <a:extLst>
-              <a:ext uri="{FF2B5EF4-FFF2-40B4-BE49-F238E27FC236}">
-                <a16:creationId xmlns:a16="http://schemas.microsoft.com/office/drawing/2014/main" id="{889DD315-5AB5-446D-B7D6-C2643E8BB498}"/>
-              </a:ext>
-            </a:extLst>
-          </p:cNvPr>
-          <p:cNvSpPr>
-            <a:spLocks noGrp="1"/>
-          </p:cNvSpPr>
-          <p:nvPr>
-            <p:ph idx="1"/>
-          </p:nvPr>
-        </p:nvSpPr>
-        <p:spPr>
-          <a:xfrm>
-            <a:off x="760413" y="1143001"/>
-            <a:ext cx="9896392" cy="4876800"/>
-          </a:xfrm>
-        </p:spPr>
-        <p:txBody>
-          <a:bodyPr>
-            <a:noAutofit/>
-          </a:bodyPr>
-          <a:lstStyle/>
-          <a:p>
-            <a:pPr marL="0" indent="0">
-              <a:buNone/>
-            </a:pPr>
-            <a:r>
-              <a:rPr lang="en-US" sz="1400" dirty="0">
-                <a:solidFill>
-                  <a:schemeClr val="accent1"/>
-                </a:solidFill>
-              </a:rPr>
-              <a:t>1.</a:t>
-            </a:r>
-            <a:r>
-              <a:rPr lang="en-US" sz="1400" i="1" dirty="0">
-                <a:solidFill>
-                  <a:schemeClr val="accent1"/>
-                </a:solidFill>
-              </a:rPr>
-              <a:t>Grow the online channel </a:t>
-            </a:r>
-          </a:p>
-          <a:p>
-            <a:pPr marL="0" indent="0">
-              <a:buNone/>
-            </a:pPr>
-            <a:r>
-              <a:rPr lang="en-US" sz="1400" dirty="0"/>
-              <a:t>With only 20.5% of revenue online, investing in e-commerce </a:t>
-            </a:r>
-            <a:r>
-              <a:rPr lang="en-US" sz="1400" dirty="0" err="1"/>
-              <a:t>ux</a:t>
-            </a:r>
-            <a:r>
-              <a:rPr lang="en-US" sz="1400" dirty="0"/>
-              <a:t>, digital marketing and same day delivery can significantly increase revenue without requiring additional physical stores</a:t>
-            </a:r>
-          </a:p>
-          <a:p>
-            <a:pPr marL="0" indent="0">
-              <a:buNone/>
-            </a:pPr>
-            <a:r>
-              <a:rPr lang="en-US" sz="1400" i="1" dirty="0">
-                <a:solidFill>
-                  <a:schemeClr val="accent1"/>
-                </a:solidFill>
-              </a:rPr>
-              <a:t>2.Expand geographic foot print</a:t>
-            </a:r>
-          </a:p>
-          <a:p>
-            <a:pPr marL="0" indent="0">
-              <a:buNone/>
-            </a:pPr>
-            <a:r>
-              <a:rPr lang="en-US" sz="1400" dirty="0"/>
-              <a:t>Reduce dependency on the US market, Australia and Southern Europe (Italy)show growing demand and offer expansion opportunities</a:t>
-            </a:r>
-          </a:p>
-          <a:p>
-            <a:pPr marL="0" indent="0">
-              <a:buNone/>
-            </a:pPr>
-            <a:r>
-              <a:rPr lang="en-US" sz="1400" i="1" dirty="0">
-                <a:solidFill>
-                  <a:schemeClr val="accent1"/>
-                </a:solidFill>
-              </a:rPr>
-              <a:t>3.Target Senior Segment</a:t>
-            </a:r>
-          </a:p>
-          <a:p>
-            <a:pPr marL="0" indent="0">
-              <a:buNone/>
-            </a:pPr>
-            <a:r>
-              <a:rPr lang="en-US" sz="1400" dirty="0"/>
-              <a:t>Seniors generate more revenue, design dedicated loyalty programs, easier to use product lines and in store assistance program to retain growth </a:t>
-            </a:r>
-          </a:p>
-          <a:p>
-            <a:pPr marL="0" indent="0">
-              <a:buNone/>
-            </a:pPr>
-            <a:r>
-              <a:rPr lang="en-US" sz="1400" i="1" dirty="0">
-                <a:solidFill>
-                  <a:schemeClr val="accent1"/>
-                </a:solidFill>
-              </a:rPr>
-              <a:t>4.Invest in high margin category items</a:t>
-            </a:r>
-          </a:p>
-          <a:p>
-            <a:pPr marL="0" indent="0">
-              <a:buNone/>
-            </a:pPr>
-            <a:r>
-              <a:rPr lang="en-GB" sz="1400" dirty="0"/>
-              <a:t>Cameras &amp;amp; Camcorders (60.1% margin) and TV &amp;amp; Video (59.7% margin) offer superior returns. Allocate more floor space and targeted promotions to these categories</a:t>
-            </a:r>
-            <a:r>
-              <a:rPr lang="en-GB" sz="1400" i="1" dirty="0">
-                <a:solidFill>
-                  <a:schemeClr val="accent1"/>
-                </a:solidFill>
-              </a:rPr>
-              <a:t>.</a:t>
-            </a:r>
-            <a:endParaRPr lang="en-US" sz="1400" i="1" dirty="0">
-              <a:solidFill>
-                <a:schemeClr val="accent1"/>
-              </a:solidFill>
-            </a:endParaRPr>
-          </a:p>
-          <a:p>
-            <a:pPr marL="0" indent="0">
-              <a:buNone/>
-            </a:pPr>
-            <a:r>
-              <a:rPr lang="en-GB" sz="1400" i="1" dirty="0">
-                <a:solidFill>
-                  <a:schemeClr val="accent1"/>
-                </a:solidFill>
-              </a:rPr>
-              <a:t>5.Post-Pandemic Recovery Strategy</a:t>
-            </a:r>
-          </a:p>
-          <a:p>
-            <a:pPr marL="0" indent="0">
-              <a:buNone/>
-            </a:pPr>
-            <a:r>
-              <a:rPr lang="en-GB" sz="1400" dirty="0"/>
-              <a:t>The sharp revenue decline in 2020-2021 warrants a focused recovery strategy: reactivation campaigns for dormant customers, aggressive pricing for high-demand products like laptops and home electronics (which surged during remote work/study).</a:t>
-            </a:r>
-            <a:endParaRPr lang="en-US" sz="1400" dirty="0"/>
-          </a:p>
-        </p:txBody>
-      </p:sp>
-    </p:spTree>
-    <p:extLst>
-      <p:ext uri="{BB962C8B-B14F-4D97-AF65-F5344CB8AC3E}">
-        <p14:creationId xmlns:p14="http://schemas.microsoft.com/office/powerpoint/2010/main" val="3814220841"/>
-      </p:ext>
-    </p:extLst>
-  </p:cSld>
-  <p:clrMapOvr>
-    <a:masterClrMapping/>
-  </p:clrMapOvr>
-  <mc:AlternateContent xmlns:mc="http://schemas.openxmlformats.org/markup-compatibility/2006" xmlns:p14="http://schemas.microsoft.com/office/powerpoint/2010/main">
-    <mc:Choice Requires="p14">
-      <p:transition spd="med" p14:dur="700">
-        <p:fade/>
-      </p:transition>
-    </mc:Choice>
-    <mc:Fallback xmlns="">
-      <p:transition spd="med">
-        <p:fade/>
-      </p:transition>
-    </mc:Fallback>
-  </mc:AlternateContent>
-</p:sld>
-</file>
-
-<file path=ppt/slides/slide9.xml><?xml version="1.0" encoding="utf-8"?>
-<p:sld xmlns:a="http://schemas.openxmlformats.org/drawingml/2006/main" xmlns:r="http://schemas.openxmlformats.org/officeDocument/2006/relationships" xmlns:p="http://schemas.openxmlformats.org/presentationml/2006/main">
-  <p:cSld>
-    <p:spTree>
-      <p:nvGrpSpPr>
-        <p:cNvPr id="1" name=""/>
-        <p:cNvGrpSpPr/>
-        <p:nvPr/>
-      </p:nvGrpSpPr>
-      <p:grpSpPr>
-        <a:xfrm>
-          <a:off x="0" y="0"/>
-          <a:ext cx="0" cy="0"/>
-          <a:chOff x="0" y="0"/>
-          <a:chExt cx="0" cy="0"/>
-        </a:xfrm>
-      </p:grpSpPr>
-      <p:sp>
-        <p:nvSpPr>
-          <p:cNvPr id="4" name="Title 3">
-            <a:extLst>
-              <a:ext uri="{FF2B5EF4-FFF2-40B4-BE49-F238E27FC236}">
-                <a16:creationId xmlns:a16="http://schemas.microsoft.com/office/drawing/2014/main" id="{9BD3ED6C-FBCF-2136-903C-F5CCD1D099E8}"/>
-              </a:ext>
-            </a:extLst>
-          </p:cNvPr>
-          <p:cNvSpPr>
-            <a:spLocks noGrp="1"/>
-          </p:cNvSpPr>
-          <p:nvPr>
-            <p:ph type="title"/>
-          </p:nvPr>
-        </p:nvSpPr>
-        <p:spPr>
-          <a:xfrm>
-            <a:off x="1064680" y="2590799"/>
-            <a:ext cx="8692399" cy="1371600"/>
-          </a:xfrm>
-        </p:spPr>
-        <p:txBody>
-          <a:bodyPr/>
-          <a:lstStyle/>
-          <a:p>
-            <a:r>
-              <a:rPr lang="en-US" dirty="0">
-                <a:solidFill>
-                  <a:schemeClr val="accent1"/>
-                </a:solidFill>
-              </a:rPr>
-              <a:t>THANK YOU</a:t>
-            </a:r>
-          </a:p>
-        </p:txBody>
-      </p:sp>
-      <p:sp>
-        <p:nvSpPr>
-          <p:cNvPr id="5" name="Text Placeholder 4">
-            <a:extLst>
-              <a:ext uri="{FF2B5EF4-FFF2-40B4-BE49-F238E27FC236}">
-                <a16:creationId xmlns:a16="http://schemas.microsoft.com/office/drawing/2014/main" id="{D5E979C8-5F06-62C2-0F6C-002421089644}"/>
-              </a:ext>
-            </a:extLst>
-          </p:cNvPr>
-          <p:cNvSpPr>
-            <a:spLocks noGrp="1"/>
-          </p:cNvSpPr>
-          <p:nvPr>
-            <p:ph type="body" idx="1"/>
-          </p:nvPr>
-        </p:nvSpPr>
-        <p:spPr>
-          <a:xfrm>
-            <a:off x="227013" y="6400800"/>
-            <a:ext cx="9525534" cy="381000"/>
-          </a:xfrm>
-        </p:spPr>
-        <p:txBody>
-          <a:bodyPr>
-            <a:normAutofit/>
-          </a:bodyPr>
-          <a:lstStyle/>
-          <a:p>
-            <a:r>
-              <a:rPr lang="en-US" sz="1100" i="1" dirty="0"/>
-              <a:t>Data analytics capstone project may 2026</a:t>
-            </a:r>
-          </a:p>
-        </p:txBody>
-      </p:sp>
-    </p:spTree>
-    <p:extLst>
-      <p:ext uri="{BB962C8B-B14F-4D97-AF65-F5344CB8AC3E}">
-        <p14:creationId xmlns:p14="http://schemas.microsoft.com/office/powerpoint/2010/main" val="2106757151"/>
       </p:ext>
     </p:extLst>
   </p:cSld>
